--- a/Signify_iQOO_Hackathon_2026_Final.pptx
+++ b/Signify_iQOO_Hackathon_2026_Final.pptx
@@ -3195,8 +3195,8 @@
         </p:nvSpPr>
         <p:spPr>
           <a:xfrm>
-            <a:off x="731520" y="6446520"/>
-            <a:ext cx="10698480" cy="320040"/>
+            <a:off x="731520" y="6492240"/>
+            <a:ext cx="10698480" cy="274320"/>
           </a:xfrm>
           <a:prstGeom prst="rect">
             <a:avLst/>
@@ -3210,7 +3210,7 @@
           <a:lstStyle/>
           <a:p>
             <a:pPr>
-              <a:defRPr sz="850" b="1">
+              <a:defRPr sz="800" b="1">
                 <a:solidFill>
                   <a:srgbClr val="5A5F6E"/>
                 </a:solidFill>
@@ -3232,7 +3232,7 @@
         <p:spPr>
           <a:xfrm>
             <a:off x="731520" y="1188720"/>
-            <a:ext cx="7772400" cy="4389120"/>
+            <a:ext cx="7498079" cy="4846320"/>
           </a:xfrm>
           <a:prstGeom prst="rect">
             <a:avLst/>
@@ -3246,7 +3246,7 @@
           <a:lstStyle/>
           <a:p>
             <a:pPr>
-              <a:defRPr sz="1200" b="1">
+              <a:defRPr sz="1100" b="1">
                 <a:solidFill>
                   <a:srgbClr val="FFD000"/>
                 </a:solidFill>
@@ -3254,12 +3254,12 @@
               </a:defRPr>
             </a:pPr>
             <a:r>
-              <a:t>iQOO HACKATHON 2026 // HEALTHTECH &amp; ACCESSIBILITY</a:t>
-            </a:r>
-          </a:p>
-          <a:p>
-            <a:pPr>
-              <a:defRPr sz="5400" b="1">
+              <a:t>[ iQOO HACKATHON 2026 // HEALTHTECH &amp; ACCESSIBILITY ]</a:t>
+            </a:r>
+          </a:p>
+          <a:p>
+            <a:pPr>
+              <a:defRPr sz="5600" b="1">
                 <a:solidFill>
                   <a:srgbClr val="FFFFFF"/>
                 </a:solidFill>
@@ -3272,7 +3272,7 @@
           </a:p>
           <a:p>
             <a:pPr>
-              <a:defRPr sz="2800" b="1">
+              <a:defRPr sz="2400" b="1">
                 <a:solidFill>
                   <a:srgbClr val="FFD000"/>
                 </a:solidFill>
@@ -3286,7 +3286,7 @@
           <a:p>
             <a:br/>
             <a:pPr>
-              <a:defRPr sz="1400">
+              <a:defRPr sz="1300">
                 <a:solidFill>
                   <a:srgbClr val="9CA3AF"/>
                 </a:solidFill>
@@ -3294,7 +3294,46 @@
               </a:defRPr>
             </a:pPr>
             <a:r>
-              <a:t>A phone-first bidirectional communication assistant bridging sign-language users and spoken voice using Qualcomm Snapdragon Hexagon NPU acceleration and the Kaggle ASL 250 ML Foundation.</a:t>
+              <a:t>A phone-first on-device AI bidirectional communication assistant bridging sign-language users and spoken voice using the Qualcomm Snapdragon Hexagon NPU and Kaggle ASL 250 ML foundation.</a:t>
+            </a:r>
+          </a:p>
+          <a:p>
+            <a:pPr>
+              <a:defRPr sz="1050" b="1">
+                <a:solidFill>
+                  <a:srgbClr val="FFFFFF"/>
+                </a:solidFill>
+                <a:latin typeface="Consolas"/>
+              </a:defRPr>
+            </a:pPr>
+            <a:r>
+              <a:t>▶ &lt; 18 ms LATENCY: On-device Hexagon NPU via Qualcomm QNN SDK</a:t>
+            </a:r>
+          </a:p>
+          <a:p>
+            <a:pPr>
+              <a:defRPr sz="1050" b="1">
+                <a:solidFill>
+                  <a:srgbClr val="FFFFFF"/>
+                </a:solidFill>
+                <a:latin typeface="Consolas"/>
+              </a:defRPr>
+            </a:pPr>
+            <a:r>
+              <a:t>▶ TWO-WAY BRIDGE: Sign → Speech AND Voice → Accessible Text</a:t>
+            </a:r>
+          </a:p>
+          <a:p>
+            <a:pPr>
+              <a:defRPr sz="1050" b="1">
+                <a:solidFill>
+                  <a:srgbClr val="FFFFFF"/>
+                </a:solidFill>
+                <a:latin typeface="Consolas"/>
+              </a:defRPr>
+            </a:pPr>
+            <a:r>
+              <a:t>▶ ZERO HALLUCINATION: Deterministic context-aware grammar engine</a:t>
             </a:r>
           </a:p>
         </p:txBody>
@@ -3307,14 +3346,14 @@
         </p:nvSpPr>
         <p:spPr>
           <a:xfrm>
-            <a:off x="8229600" y="1188720"/>
-            <a:ext cx="3200400" cy="4846320"/>
+            <a:off x="8887968" y="1115568"/>
+            <a:ext cx="2715768" cy="5084064"/>
           </a:xfrm>
           <a:prstGeom prst="roundRect">
             <a:avLst/>
           </a:prstGeom>
           <a:solidFill>
-            <a:srgbClr val="13151C"/>
+            <a:srgbClr val="0E0F14"/>
           </a:solidFill>
           <a:ln w="15240">
             <a:solidFill>
@@ -3337,131 +3376,37 @@
           </a:fontRef>
         </p:style>
         <p:txBody>
-          <a:bodyPr rtlCol="0" anchor="ctr" wrap="square" lIns="274320" rIns="274320" tIns="365760"/>
-          <a:lstStyle/>
-          <a:p>
-            <a:pPr algn="ctr">
-              <a:defRPr sz="1100" b="1">
-                <a:solidFill>
-                  <a:srgbClr val="FFD000"/>
-                </a:solidFill>
-                <a:latin typeface="Consolas"/>
-              </a:defRPr>
-            </a:pPr>
-            <a:r>
-              <a:t>HARDWARE ENGINE SPECS</a:t>
-            </a:r>
-          </a:p>
-          <a:p>
-            <a:br/>
-            <a:pPr>
-              <a:defRPr sz="1100" b="1">
-                <a:solidFill>
-                  <a:srgbClr val="FFFFFF"/>
-                </a:solidFill>
-                <a:latin typeface="Consolas"/>
-              </a:defRPr>
-            </a:pPr>
-            <a:r>
-              <a:t>▶ NPU INFERENCE</a:t>
-            </a:r>
-          </a:p>
-          <a:p>
-            <a:pPr>
-              <a:defRPr sz="950">
-                <a:solidFill>
-                  <a:srgbClr val="9CA3AF"/>
-                </a:solidFill>
-                <a:latin typeface="Segoe UI"/>
-              </a:defRPr>
-            </a:pPr>
-            <a:r>
-              <a:t>&lt; 18ms real-time latency on Snapdragon Hexagon DSP via QNN TFLite delegate.</a:t>
-            </a:r>
-          </a:p>
-          <a:p>
-            <a:br/>
-            <a:pPr>
-              <a:defRPr sz="1100" b="1">
-                <a:solidFill>
-                  <a:srgbClr val="FFFFFF"/>
-                </a:solidFill>
-                <a:latin typeface="Consolas"/>
-              </a:defRPr>
-            </a:pPr>
-            <a:r>
-              <a:t>▶ 2-WAY BRIDGE</a:t>
-            </a:r>
-          </a:p>
-          <a:p>
-            <a:pPr>
-              <a:defRPr sz="950">
-                <a:solidFill>
-                  <a:srgbClr val="9CA3AF"/>
-                </a:solidFill>
-                <a:latin typeface="Segoe UI"/>
-              </a:defRPr>
-            </a:pPr>
-            <a:r>
-              <a:t>Forward Sign → Speech AND Reverse Voice → Accessible High-Contrast text.</a:t>
-            </a:r>
-          </a:p>
-          <a:p>
-            <a:br/>
-            <a:pPr>
-              <a:defRPr sz="1100" b="1">
-                <a:solidFill>
-                  <a:srgbClr val="FFFFFF"/>
-                </a:solidFill>
-                <a:latin typeface="Consolas"/>
-              </a:defRPr>
-            </a:pPr>
-            <a:r>
-              <a:t>▶ SAFETY GATING</a:t>
-            </a:r>
-          </a:p>
-          <a:p>
-            <a:pPr>
-              <a:defRPr sz="950">
-                <a:solidFill>
-                  <a:srgbClr val="9CA3AF"/>
-                </a:solidFill>
-                <a:latin typeface="Segoe UI"/>
-              </a:defRPr>
-            </a:pPr>
-            <a:r>
-              <a:t>Strict 70% confidence threshold + 2-frame temporal stability filtering.</a:t>
-            </a:r>
-          </a:p>
-          <a:p>
-            <a:br/>
-            <a:pPr>
-              <a:defRPr sz="1100" b="1">
-                <a:solidFill>
-                  <a:srgbClr val="FFFFFF"/>
-                </a:solidFill>
-                <a:latin typeface="Consolas"/>
-              </a:defRPr>
-            </a:pPr>
-            <a:r>
-              <a:t>▶ SILENT HAPTICS</a:t>
-            </a:r>
-          </a:p>
-          <a:p>
-            <a:pPr>
-              <a:defRPr sz="950">
-                <a:solidFill>
-                  <a:srgbClr val="9CA3AF"/>
-                </a:solidFill>
-                <a:latin typeface="Segoe UI"/>
-              </a:defRPr>
-            </a:pPr>
-            <a:r>
-              <a:t>Discrete linear resonant vibration pulses so users never break eye contact.</a:t>
-            </a:r>
-          </a:p>
-        </p:txBody>
-      </p:sp>
+          <a:bodyPr rtlCol="0" anchor="ctr"/>
+          <a:lstStyle/>
+          <a:p>
+            <a:pPr algn="ctr"/>
+          </a:p>
+        </p:txBody>
+      </p:sp>
+      <p:pic>
+        <p:nvPicPr>
+          <p:cNvPr id="7" name="Picture 6" descr="media_1790022950557.png"/>
+          <p:cNvPicPr>
+            <a:picLocks noChangeAspect="1"/>
+          </p:cNvPicPr>
+          <p:nvPr/>
+        </p:nvPicPr>
+        <p:blipFill>
+          <a:blip r:embed="rId2"/>
+          <a:stretch>
+            <a:fillRect/>
+          </a:stretch>
+        </p:blipFill>
+        <p:spPr>
+          <a:xfrm>
+            <a:off x="8961120" y="1188720"/>
+            <a:ext cx="2569464" cy="4937760"/>
+          </a:xfrm>
+          <a:prstGeom prst="rect">
+            <a:avLst/>
+          </a:prstGeom>
+        </p:spPr>
+      </p:pic>
     </p:spTree>
   </p:cSld>
   <p:clrMapOvr>
@@ -3589,7 +3534,7 @@
           <a:lstStyle/>
           <a:p>
             <a:pPr>
-              <a:defRPr sz="1000" b="1">
+              <a:defRPr sz="950" b="1">
                 <a:solidFill>
                   <a:srgbClr val="FFD000"/>
                 </a:solidFill>
@@ -3597,12 +3542,12 @@
               </a:defRPr>
             </a:pPr>
             <a:r>
-              <a:t>09 // HARDWARE DELEGATE BENCHMARK</a:t>
-            </a:r>
-          </a:p>
-          <a:p>
-            <a:pPr>
-              <a:defRPr sz="2200" b="1">
+              <a:t>09 // HIGH-CONTRAST ACCESSIBILITY</a:t>
+            </a:r>
+          </a:p>
+          <a:p>
+            <a:pPr>
+              <a:defRPr sz="2100" b="1">
                 <a:solidFill>
                   <a:srgbClr val="FFFFFF"/>
                 </a:solidFill>
@@ -3610,12 +3555,12 @@
               </a:defRPr>
             </a:pPr>
             <a:r>
-              <a:t>QUALCOMM SNAPDRAGON HEXAGON NPU ACCELERATION</a:t>
-            </a:r>
-          </a:p>
-          <a:p>
-            <a:pPr>
-              <a:defRPr sz="1100">
+              <a:t>ACCESSIBLE HIGH-CONTRAST READOUT FOR SIGNERS</a:t>
+            </a:r>
+          </a:p>
+          <a:p>
+            <a:pPr>
+              <a:defRPr sz="1050">
                 <a:solidFill>
                   <a:srgbClr val="9CA3AF"/>
                 </a:solidFill>
@@ -3623,7 +3568,7 @@
               </a:defRPr>
             </a:pPr>
             <a:r>
-              <a:t>Unlocking real-time sub-18ms on-device inference using Qualcomm AI Engine Direct (QNN SDK).</a:t>
+              <a:t>Clear, legible visual output designed for readability across a hospital bed or desk.</a:t>
             </a:r>
           </a:p>
         </p:txBody>
@@ -3636,8 +3581,8 @@
         </p:nvSpPr>
         <p:spPr>
           <a:xfrm>
-            <a:off x="731520" y="6446520"/>
-            <a:ext cx="10698480" cy="320040"/>
+            <a:off x="731520" y="6492240"/>
+            <a:ext cx="10698480" cy="274320"/>
           </a:xfrm>
           <a:prstGeom prst="rect">
             <a:avLst/>
@@ -3651,7 +3596,7 @@
           <a:lstStyle/>
           <a:p>
             <a:pPr>
-              <a:defRPr sz="850" b="1">
+              <a:defRPr sz="800" b="1">
                 <a:solidFill>
                   <a:srgbClr val="5A5F6E"/>
                 </a:solidFill>
@@ -3673,17 +3618,17 @@
         <p:spPr>
           <a:xfrm>
             <a:off x="731520" y="1645920"/>
-            <a:ext cx="6217920" cy="4389120"/>
+            <a:ext cx="6858000" cy="4389120"/>
           </a:xfrm>
           <a:prstGeom prst="roundRect">
             <a:avLst/>
           </a:prstGeom>
           <a:solidFill>
-            <a:srgbClr val="13151C"/>
+            <a:srgbClr val="12141A"/>
           </a:solidFill>
           <a:ln w="15240">
             <a:solidFill>
-              <a:srgbClr val="282C38"/>
+              <a:srgbClr val="2A2E3A"/>
             </a:solidFill>
           </a:ln>
         </p:spPr>
@@ -3714,13 +3659,13 @@
               </a:defRPr>
             </a:pPr>
             <a:r>
-              <a:t>HARDWARE EXECUTION BENCHMARK COMPARISON</a:t>
-            </a:r>
-          </a:p>
-          <a:p>
-            <a:br/>
-            <a:pPr>
-              <a:defRPr sz="1100" b="1">
+              <a:t>DEAF-FIRST ERGONOMIC DESIGN</a:t>
+            </a:r>
+          </a:p>
+          <a:p>
+            <a:br/>
+            <a:pPr>
+              <a:defRPr sz="1050" b="1">
                 <a:solidFill>
                   <a:srgbClr val="FFFFFF"/>
                 </a:solidFill>
@@ -3728,7 +3673,7 @@
               </a:defRPr>
             </a:pPr>
             <a:r>
-              <a:t>▶ INFERENCE LATENCY:</a:t>
+              <a:t>▶ 24pt HIGH-CONTRAST DISPLAY</a:t>
             </a:r>
           </a:p>
           <a:p>
@@ -3741,13 +3686,13 @@
               </a:defRPr>
             </a:pPr>
             <a:r>
-              <a:t>   • CPU: 145 ms (Stutter)  |  Cloud: 280 ms (Lag)  |  NPU: &lt; 18 ms (Sub-frame)</a:t>
-            </a:r>
-          </a:p>
-          <a:p>
-            <a:br/>
-            <a:pPr>
-              <a:defRPr sz="1100" b="1">
+              <a:t>Bold white text framed in glowing cyber-gold card on OLED black.</a:t>
+            </a:r>
+          </a:p>
+          <a:p>
+            <a:br/>
+            <a:pPr>
+              <a:defRPr sz="1050" b="1">
                 <a:solidFill>
                   <a:srgbClr val="FFFFFF"/>
                 </a:solidFill>
@@ -3755,7 +3700,7 @@
               </a:defRPr>
             </a:pPr>
             <a:r>
-              <a:t>▶ POWER DISSIPATION:</a:t>
+              <a:t>▶ 100% VISIBLE STATUS</a:t>
             </a:r>
           </a:p>
           <a:p>
@@ -3768,13 +3713,13 @@
               </a:defRPr>
             </a:pPr>
             <a:r>
-              <a:t>   • CPU: 3.8 W (Hot)  |  Cloud: Radio Active  |  NPU: 0.42 W (All-Day)</a:t>
-            </a:r>
-          </a:p>
-          <a:p>
-            <a:br/>
-            <a:pPr>
-              <a:defRPr sz="1100" b="1">
+              <a:t>Instant visual confirmation that the speech has been accurately converted.</a:t>
+            </a:r>
+          </a:p>
+          <a:p>
+            <a:br/>
+            <a:pPr>
+              <a:defRPr sz="1050" b="1">
                 <a:solidFill>
                   <a:srgbClr val="FFFFFF"/>
                 </a:solidFill>
@@ -3782,7 +3727,7 @@
               </a:defRPr>
             </a:pPr>
             <a:r>
-              <a:t>▶ DATA BANDWIDTH:</a:t>
+              <a:t>▶ AUDIO REPLAY CONTROL</a:t>
             </a:r>
           </a:p>
           <a:p>
@@ -3795,13 +3740,13 @@
               </a:defRPr>
             </a:pPr>
             <a:r>
-              <a:t>   • CPU: 0 KB/s  |  Cloud: 120 KB/s  |  NPU: 0 KB/s (Zero Bandwidth)</a:t>
-            </a:r>
-          </a:p>
-          <a:p>
-            <a:br/>
-            <a:pPr>
-              <a:defRPr sz="1100" b="1">
+              <a:t>Replay button allows deaf user to verify what audio was transcribed.</a:t>
+            </a:r>
+          </a:p>
+          <a:p>
+            <a:br/>
+            <a:pPr>
+              <a:defRPr sz="1050" b="1">
                 <a:solidFill>
                   <a:srgbClr val="FFFFFF"/>
                 </a:solidFill>
@@ -3809,7 +3754,7 @@
               </a:defRPr>
             </a:pPr>
             <a:r>
-              <a:t>▶ OFFLINE INTEGRITY:</a:t>
+              <a:t>▶ ONE-CLICK TO CONVERSATION</a:t>
             </a:r>
           </a:p>
           <a:p>
@@ -3822,7 +3767,7 @@
               </a:defRPr>
             </a:pPr>
             <a:r>
-              <a:t>   • CPU: 100% Local  |  Cloud: Fails without Web  |  NPU: 100% Secure &amp; HIPAA</a:t>
+              <a:t>Instantly appends transcribed speech to the unified conversation bridge.</a:t>
             </a:r>
           </a:p>
         </p:txBody>
@@ -3835,14 +3780,14 @@
         </p:nvSpPr>
         <p:spPr>
           <a:xfrm>
-            <a:off x="7315200" y="1645920"/>
-            <a:ext cx="4114800" cy="4389120"/>
+            <a:off x="8339328" y="1572768"/>
+            <a:ext cx="2432304" cy="4535424"/>
           </a:xfrm>
           <a:prstGeom prst="roundRect">
             <a:avLst/>
           </a:prstGeom>
           <a:solidFill>
-            <a:srgbClr val="13151C"/>
+            <a:srgbClr val="0E0F14"/>
           </a:solidFill>
           <a:ln w="15240">
             <a:solidFill>
@@ -3865,68 +3810,37 @@
           </a:fontRef>
         </p:style>
         <p:txBody>
-          <a:bodyPr rtlCol="0" anchor="ctr" wrap="square" lIns="320040" rIns="320040" tIns="320040"/>
-          <a:lstStyle/>
-          <a:p>
-            <a:pPr algn="ctr">
-              <a:defRPr sz="1200" b="1">
-                <a:solidFill>
-                  <a:srgbClr val="FFD000"/>
-                </a:solidFill>
-                <a:latin typeface="Consolas"/>
-              </a:defRPr>
-            </a:pPr>
-            <a:r>
-              <a:t>QUALCOMM QNN PIPELINE</a:t>
-            </a:r>
-          </a:p>
-          <a:p>
-            <a:br/>
-            <a:pPr>
-              <a:defRPr sz="1050">
-                <a:solidFill>
-                  <a:srgbClr val="FFFFFF"/>
-                </a:solidFill>
-                <a:latin typeface="Segoe UI"/>
-              </a:defRPr>
-            </a:pPr>
-            <a:r>
-              <a:t>1. Model Quantization:</a:t>
-            </a:r>
-            <a:br/>
-            <a:r>
-              <a:t>   11.2 MB FP32 TFLite model quantized to 4.8 MB INT8 weights.</a:t>
-            </a:r>
-            <a:br/>
-            <a:br/>
-            <a:r>
-              <a:t>2. Qualcomm AI Engine Direct:</a:t>
-            </a:r>
-            <a:br/>
-            <a:r>
-              <a:t>   Compiled with QNN SDK (libQnnTfliteDelegate.so).</a:t>
-            </a:r>
-            <a:br/>
-            <a:br/>
-            <a:r>
-              <a:t>3. Zero Memory Copies:</a:t>
-            </a:r>
-            <a:br/>
-            <a:r>
-              <a:t>   Direct camera AHARDWAREBUFFER binding to DSP shared memory.</a:t>
-            </a:r>
-            <a:br/>
-            <a:br/>
-            <a:r>
-              <a:t>4. iQOO 15 Flagship Synergy:</a:t>
-            </a:r>
-            <a:br/>
-            <a:r>
-              <a:t>   Harnesses Hexagon NPU for all-day thermal stability.</a:t>
-            </a:r>
-          </a:p>
-        </p:txBody>
-      </p:sp>
+          <a:bodyPr rtlCol="0" anchor="ctr"/>
+          <a:lstStyle/>
+          <a:p>
+            <a:pPr algn="ctr"/>
+          </a:p>
+        </p:txBody>
+      </p:sp>
+      <p:pic>
+        <p:nvPicPr>
+          <p:cNvPr id="8" name="Picture 7" descr="media_1790023565735.png"/>
+          <p:cNvPicPr>
+            <a:picLocks noChangeAspect="1"/>
+          </p:cNvPicPr>
+          <p:nvPr/>
+        </p:nvPicPr>
+        <p:blipFill>
+          <a:blip r:embed="rId2"/>
+          <a:stretch>
+            <a:fillRect/>
+          </a:stretch>
+        </p:blipFill>
+        <p:spPr>
+          <a:xfrm>
+            <a:off x="8412480" y="1645920"/>
+            <a:ext cx="2286000" cy="4389120"/>
+          </a:xfrm>
+          <a:prstGeom prst="rect">
+            <a:avLst/>
+          </a:prstGeom>
+        </p:spPr>
+      </p:pic>
     </p:spTree>
   </p:cSld>
   <p:clrMapOvr>
@@ -4054,7 +3968,7 @@
           <a:lstStyle/>
           <a:p>
             <a:pPr>
-              <a:defRPr sz="1000" b="1">
+              <a:defRPr sz="950" b="1">
                 <a:solidFill>
                   <a:srgbClr val="FFD000"/>
                 </a:solidFill>
@@ -4062,12 +3976,12 @@
               </a:defRPr>
             </a:pPr>
             <a:r>
-              <a:t>10 // ANDROID NATIVE DEPLOYMENT</a:t>
-            </a:r>
-          </a:p>
-          <a:p>
-            <a:pPr>
-              <a:defRPr sz="2200" b="1">
+              <a:t>10 // HARDWARE ACCELERATION BENCHMARK</a:t>
+            </a:r>
+          </a:p>
+          <a:p>
+            <a:pPr>
+              <a:defRPr sz="2100" b="1">
                 <a:solidFill>
                   <a:srgbClr val="FFFFFF"/>
                 </a:solidFill>
@@ -4075,12 +3989,12 @@
               </a:defRPr>
             </a:pPr>
             <a:r>
-              <a:t>HOW TO IMPLEMENT SIGNIFY ON AN IQOO ANDROID PHONE</a:t>
-            </a:r>
-          </a:p>
-          <a:p>
-            <a:pPr>
-              <a:defRPr sz="1100">
+              <a:t>QUALCOMM SNAPDRAGON HEXAGON NPU ACCELERATION</a:t>
+            </a:r>
+          </a:p>
+          <a:p>
+            <a:pPr>
+              <a:defRPr sz="1050">
                 <a:solidFill>
                   <a:srgbClr val="9CA3AF"/>
                 </a:solidFill>
@@ -4088,7 +4002,7 @@
               </a:defRPr>
             </a:pPr>
             <a:r>
-              <a:t>Two clear pathways: Rapid APK packaging for hackathons and the native Jetpack CameraX production architecture.</a:t>
+              <a:t>Unlocking sub-18ms on-device inference using Qualcomm AI Engine Direct (QNN SDK).</a:t>
             </a:r>
           </a:p>
         </p:txBody>
@@ -4101,8 +4015,8 @@
         </p:nvSpPr>
         <p:spPr>
           <a:xfrm>
-            <a:off x="731520" y="6446520"/>
-            <a:ext cx="10698480" cy="320040"/>
+            <a:off x="731520" y="6492240"/>
+            <a:ext cx="10698480" cy="274320"/>
           </a:xfrm>
           <a:prstGeom prst="rect">
             <a:avLst/>
@@ -4116,7 +4030,7 @@
           <a:lstStyle/>
           <a:p>
             <a:pPr>
-              <a:defRPr sz="850" b="1">
+              <a:defRPr sz="800" b="1">
                 <a:solidFill>
                   <a:srgbClr val="5A5F6E"/>
                 </a:solidFill>
@@ -4138,13 +4052,13 @@
         <p:spPr>
           <a:xfrm>
             <a:off x="731520" y="1645920"/>
-            <a:ext cx="5120640" cy="4389120"/>
+            <a:ext cx="10698480" cy="914400"/>
           </a:xfrm>
           <a:prstGeom prst="roundRect">
             <a:avLst/>
           </a:prstGeom>
           <a:solidFill>
-            <a:srgbClr val="13151C"/>
+            <a:srgbClr val="12141A"/>
           </a:solidFill>
           <a:ln w="15240">
             <a:solidFill>
@@ -4167,11 +4081,11 @@
           </a:fontRef>
         </p:style>
         <p:txBody>
-          <a:bodyPr rtlCol="0" anchor="ctr" wrap="square" lIns="320040" rIns="320040" tIns="320040"/>
+          <a:bodyPr rtlCol="0" anchor="ctr" wrap="square" lIns="274320" rIns="274320" tIns="137160"/>
           <a:lstStyle/>
           <a:p>
             <a:pPr algn="ctr">
-              <a:defRPr sz="1200" b="1">
+              <a:defRPr sz="1100" b="1">
                 <a:solidFill>
                   <a:srgbClr val="FFD000"/>
                 </a:solidFill>
@@ -4179,26 +4093,12 @@
               </a:defRPr>
             </a:pPr>
             <a:r>
-              <a:t>PATH A: CAPACITOR APK PACKAGING (FASTEST)</a:t>
-            </a:r>
-          </a:p>
-          <a:p>
-            <a:pPr>
-              <a:defRPr sz="1400" b="1">
-                <a:solidFill>
-                  <a:srgbClr val="FFFFFF"/>
-                </a:solidFill>
-                <a:latin typeface="Segoe UI"/>
-              </a:defRPr>
-            </a:pPr>
-            <a:r>
-              <a:t>Converting Vite / React into a Standalone Android APK</a:t>
-            </a:r>
-          </a:p>
-          <a:p>
-            <a:br/>
-            <a:pPr>
-              <a:defRPr sz="1050">
+              <a:t>HARDWARE PIPELINE: CAMERA (60 FPS) → MEDIAPIPE (543 KEYPOINTS) → TFLITE (INT8) → QUALCOMM QNN → HEXAGON DSP</a:t>
+            </a:r>
+          </a:p>
+          <a:p>
+            <a:pPr>
+              <a:defRPr sz="1000">
                 <a:solidFill>
                   <a:srgbClr val="9CA3AF"/>
                 </a:solidFill>
@@ -4206,23 +4106,7 @@
               </a:defRPr>
             </a:pPr>
             <a:r>
-              <a:t>• Install Capacitor CLI: @capacitor/core &amp; @capacitor/android.</a:t>
-            </a:r>
-            <a:br/>
-            <a:r>
-              <a:t>• Initialize Project: npx cap init "Signify" com.signify.app.</a:t>
-            </a:r>
-            <a:br/>
-            <a:r>
-              <a:t>• Manifest Permissions: Camera, Audio, Vibrator &amp; Internet access.</a:t>
-            </a:r>
-            <a:br/>
-            <a:r>
-              <a:t>• Build &amp; Install: Generates release .apk directly from Android Studio.</a:t>
-            </a:r>
-            <a:br/>
-            <a:r>
-              <a:t>• Judge Zero-Install (PWA): Also installable directly from Vercel via Chrome as a full-screen WebAPK with no URL bar!</a:t>
+              <a:t>Direct AHARDWAREBUFFER memory binding offloads matrix math directly to Hexagon NPU with zero CPU memory copies.</a:t>
             </a:r>
           </a:p>
         </p:txBody>
@@ -4235,14 +4119,194 @@
         </p:nvSpPr>
         <p:spPr>
           <a:xfrm>
-            <a:off x="6309360" y="1645920"/>
-            <a:ext cx="5120640" cy="4389120"/>
+            <a:off x="731520" y="2834640"/>
+            <a:ext cx="2468880" cy="3200400"/>
           </a:xfrm>
           <a:prstGeom prst="roundRect">
             <a:avLst/>
           </a:prstGeom>
           <a:solidFill>
-            <a:srgbClr val="13151C"/>
+            <a:srgbClr val="12141A"/>
+          </a:solidFill>
+          <a:ln w="15240">
+            <a:solidFill>
+              <a:srgbClr val="FFD000"/>
+            </a:solidFill>
+          </a:ln>
+        </p:spPr>
+        <p:style>
+          <a:lnRef idx="1">
+            <a:schemeClr val="accent1"/>
+          </a:lnRef>
+          <a:fillRef idx="3">
+            <a:schemeClr val="accent1"/>
+          </a:fillRef>
+          <a:effectRef idx="2">
+            <a:schemeClr val="accent1"/>
+          </a:effectRef>
+          <a:fontRef idx="minor">
+            <a:schemeClr val="lt1"/>
+          </a:fontRef>
+        </p:style>
+        <p:txBody>
+          <a:bodyPr rtlCol="0" anchor="ctr" wrap="square" lIns="228600" rIns="228600" tIns="274320"/>
+          <a:lstStyle/>
+          <a:p>
+            <a:pPr algn="ctr">
+              <a:defRPr sz="1000" b="1">
+                <a:solidFill>
+                  <a:srgbClr val="9CA3AF"/>
+                </a:solidFill>
+                <a:latin typeface="Consolas"/>
+              </a:defRPr>
+            </a:pPr>
+            <a:r>
+              <a:t>INFERENCE LATENCY</a:t>
+            </a:r>
+          </a:p>
+          <a:p>
+            <a:pPr>
+              <a:defRPr sz="2800" b="1">
+                <a:solidFill>
+                  <a:srgbClr val="FFD000"/>
+                </a:solidFill>
+                <a:latin typeface="Consolas"/>
+              </a:defRPr>
+            </a:pPr>
+            <a:r>
+              <a:t>&lt; 18 ms</a:t>
+            </a:r>
+          </a:p>
+          <a:p>
+            <a:br/>
+            <a:pPr>
+              <a:defRPr sz="1050">
+                <a:solidFill>
+                  <a:srgbClr val="FFFFFF"/>
+                </a:solidFill>
+                <a:latin typeface="Segoe UI"/>
+              </a:defRPr>
+            </a:pPr>
+            <a:r>
+              <a:t>vs. CPU: 145 ms</a:t>
+            </a:r>
+            <a:br/>
+            <a:r>
+              <a:t>vs. Cloud: 280 ms</a:t>
+            </a:r>
+            <a:br/>
+            <a:r>
+              <a:t>Real-time 60 FPS sub-frame speed.</a:t>
+            </a:r>
+          </a:p>
+        </p:txBody>
+      </p:sp>
+      <p:sp>
+        <p:nvSpPr>
+          <p:cNvPr id="8" name="Rounded Rectangle 7"/>
+          <p:cNvSpPr/>
+          <p:nvPr/>
+        </p:nvSpPr>
+        <p:spPr>
+          <a:xfrm>
+            <a:off x="3474720" y="2834640"/>
+            <a:ext cx="2468880" cy="3200400"/>
+          </a:xfrm>
+          <a:prstGeom prst="roundRect">
+            <a:avLst/>
+          </a:prstGeom>
+          <a:solidFill>
+            <a:srgbClr val="12141A"/>
+          </a:solidFill>
+          <a:ln w="15240">
+            <a:solidFill>
+              <a:srgbClr val="10B981"/>
+            </a:solidFill>
+          </a:ln>
+        </p:spPr>
+        <p:style>
+          <a:lnRef idx="1">
+            <a:schemeClr val="accent1"/>
+          </a:lnRef>
+          <a:fillRef idx="3">
+            <a:schemeClr val="accent1"/>
+          </a:fillRef>
+          <a:effectRef idx="2">
+            <a:schemeClr val="accent1"/>
+          </a:effectRef>
+          <a:fontRef idx="minor">
+            <a:schemeClr val="lt1"/>
+          </a:fontRef>
+        </p:style>
+        <p:txBody>
+          <a:bodyPr rtlCol="0" anchor="ctr" wrap="square" lIns="228600" rIns="228600" tIns="274320"/>
+          <a:lstStyle/>
+          <a:p>
+            <a:pPr algn="ctr">
+              <a:defRPr sz="1000" b="1">
+                <a:solidFill>
+                  <a:srgbClr val="9CA3AF"/>
+                </a:solidFill>
+                <a:latin typeface="Consolas"/>
+              </a:defRPr>
+            </a:pPr>
+            <a:r>
+              <a:t>POWER EFFICIENCY</a:t>
+            </a:r>
+          </a:p>
+          <a:p>
+            <a:pPr>
+              <a:defRPr sz="2800" b="1">
+                <a:solidFill>
+                  <a:srgbClr val="10B981"/>
+                </a:solidFill>
+                <a:latin typeface="Consolas"/>
+              </a:defRPr>
+            </a:pPr>
+            <a:r>
+              <a:t>0.42 W</a:t>
+            </a:r>
+          </a:p>
+          <a:p>
+            <a:br/>
+            <a:pPr>
+              <a:defRPr sz="1050">
+                <a:solidFill>
+                  <a:srgbClr val="FFFFFF"/>
+                </a:solidFill>
+                <a:latin typeface="Segoe UI"/>
+              </a:defRPr>
+            </a:pPr>
+            <a:r>
+              <a:t>vs. CPU: 3.8 W</a:t>
+            </a:r>
+            <a:br/>
+            <a:r>
+              <a:t>No phone overheating.</a:t>
+            </a:r>
+            <a:br/>
+            <a:r>
+              <a:t>All-day continuous operation.</a:t>
+            </a:r>
+          </a:p>
+        </p:txBody>
+      </p:sp>
+      <p:sp>
+        <p:nvSpPr>
+          <p:cNvPr id="9" name="Rounded Rectangle 8"/>
+          <p:cNvSpPr/>
+          <p:nvPr/>
+        </p:nvSpPr>
+        <p:spPr>
+          <a:xfrm>
+            <a:off x="6217920" y="2834640"/>
+            <a:ext cx="2468880" cy="3200400"/>
+          </a:xfrm>
+          <a:prstGeom prst="roundRect">
+            <a:avLst/>
+          </a:prstGeom>
+          <a:solidFill>
+            <a:srgbClr val="12141A"/>
           </a:solidFill>
           <a:ln w="15240">
             <a:solidFill>
@@ -4265,11 +4329,24 @@
           </a:fontRef>
         </p:style>
         <p:txBody>
-          <a:bodyPr rtlCol="0" anchor="ctr" wrap="square" lIns="320040" rIns="320040" tIns="320040"/>
+          <a:bodyPr rtlCol="0" anchor="ctr" wrap="square" lIns="228600" rIns="228600" tIns="274320"/>
           <a:lstStyle/>
           <a:p>
             <a:pPr algn="ctr">
-              <a:defRPr sz="1200" b="1">
+              <a:defRPr sz="1000" b="1">
+                <a:solidFill>
+                  <a:srgbClr val="9CA3AF"/>
+                </a:solidFill>
+                <a:latin typeface="Consolas"/>
+              </a:defRPr>
+            </a:pPr>
+            <a:r>
+              <a:t>BANDWIDTH COST</a:t>
+            </a:r>
+          </a:p>
+          <a:p>
+            <a:pPr>
+              <a:defRPr sz="2800" b="1">
                 <a:solidFill>
                   <a:srgbClr val="06B6D4"/>
                 </a:solidFill>
@@ -4277,12 +4354,13 @@
               </a:defRPr>
             </a:pPr>
             <a:r>
-              <a:t>PATH B: PRODUCTION NATIVE ANDROID STACK</a:t>
-            </a:r>
-          </a:p>
-          <a:p>
-            <a:pPr>
-              <a:defRPr sz="1400" b="1">
+              <a:t>0 KB/s</a:t>
+            </a:r>
+          </a:p>
+          <a:p>
+            <a:br/>
+            <a:pPr>
+              <a:defRPr sz="1050">
                 <a:solidFill>
                   <a:srgbClr val="FFFFFF"/>
                 </a:solidFill>
@@ -4290,7 +4368,83 @@
               </a:defRPr>
             </a:pPr>
             <a:r>
-              <a:t>Deep iQOO Hardware &amp; OS Integration</a:t>
+              <a:t>vs. Cloud: 120 KB/s/frame</a:t>
+            </a:r>
+            <a:br/>
+            <a:r>
+              <a:t>100% offline.</a:t>
+            </a:r>
+            <a:br/>
+            <a:r>
+              <a:t>Works in elevators &amp; flights.</a:t>
+            </a:r>
+          </a:p>
+        </p:txBody>
+      </p:sp>
+      <p:sp>
+        <p:nvSpPr>
+          <p:cNvPr id="10" name="Rounded Rectangle 9"/>
+          <p:cNvSpPr/>
+          <p:nvPr/>
+        </p:nvSpPr>
+        <p:spPr>
+          <a:xfrm>
+            <a:off x="8961120" y="2834640"/>
+            <a:ext cx="2468880" cy="3200400"/>
+          </a:xfrm>
+          <a:prstGeom prst="roundRect">
+            <a:avLst/>
+          </a:prstGeom>
+          <a:solidFill>
+            <a:srgbClr val="12141A"/>
+          </a:solidFill>
+          <a:ln w="15240">
+            <a:solidFill>
+              <a:srgbClr val="FFFFFF"/>
+            </a:solidFill>
+          </a:ln>
+        </p:spPr>
+        <p:style>
+          <a:lnRef idx="1">
+            <a:schemeClr val="accent1"/>
+          </a:lnRef>
+          <a:fillRef idx="3">
+            <a:schemeClr val="accent1"/>
+          </a:fillRef>
+          <a:effectRef idx="2">
+            <a:schemeClr val="accent1"/>
+          </a:effectRef>
+          <a:fontRef idx="minor">
+            <a:schemeClr val="lt1"/>
+          </a:fontRef>
+        </p:style>
+        <p:txBody>
+          <a:bodyPr rtlCol="0" anchor="ctr" wrap="square" lIns="228600" rIns="228600" tIns="274320"/>
+          <a:lstStyle/>
+          <a:p>
+            <a:pPr algn="ctr">
+              <a:defRPr sz="1000" b="1">
+                <a:solidFill>
+                  <a:srgbClr val="9CA3AF"/>
+                </a:solidFill>
+                <a:latin typeface="Consolas"/>
+              </a:defRPr>
+            </a:pPr>
+            <a:r>
+              <a:t>DATA PRIVACY</a:t>
+            </a:r>
+          </a:p>
+          <a:p>
+            <a:pPr>
+              <a:defRPr sz="2800" b="1">
+                <a:solidFill>
+                  <a:srgbClr val="FFFFFF"/>
+                </a:solidFill>
+                <a:latin typeface="Consolas"/>
+              </a:defRPr>
+            </a:pPr>
+            <a:r>
+              <a:t>100% LOCAL</a:t>
             </a:r>
           </a:p>
           <a:p>
@@ -4304,23 +4458,11 @@
               </a:defRPr>
             </a:pPr>
             <a:r>
-              <a:t>• CameraX ImageAnalysis: 60 FPS zero-copy YUV stream from iQOO sensor.</a:t>
-            </a:r>
-            <a:br/>
-            <a:r>
-              <a:t>• MediaPipe Tasks Vision SDK: Native Android HandLandmarker extraction.</a:t>
-            </a:r>
-            <a:br/>
-            <a:r>
-              <a:t>• TFLite QNN Delegate: Offloads 250-class inference to Hexagon NPU.</a:t>
-            </a:r>
-            <a:br/>
-            <a:r>
-              <a:t>• Android VibratorService: Precise linear resonant haptic confirmations.</a:t>
-            </a:r>
-            <a:br/>
-            <a:r>
-              <a:t>• Android TextToSpeech: Low-latency offline vocal broadcast.</a:t>
+              <a:t>Zero video leaves device.</a:t>
+            </a:r>
+            <a:br/>
+            <a:r>
+              <a:t>Full HIPAA medical privacy compliance.</a:t>
             </a:r>
           </a:p>
         </p:txBody>
@@ -4452,7 +4594,7 @@
           <a:lstStyle/>
           <a:p>
             <a:pPr>
-              <a:defRPr sz="1000" b="1">
+              <a:defRPr sz="950" b="1">
                 <a:solidFill>
                   <a:srgbClr val="FFD000"/>
                 </a:solidFill>
@@ -4460,12 +4602,12 @@
               </a:defRPr>
             </a:pPr>
             <a:r>
-              <a:t>11 // HARDWARE ADVANTAGE</a:t>
-            </a:r>
-          </a:p>
-          <a:p>
-            <a:pPr>
-              <a:defRPr sz="2200" b="1">
+              <a:t>11 // ANDROID IMPLEMENTATION</a:t>
+            </a:r>
+          </a:p>
+          <a:p>
+            <a:pPr>
+              <a:defRPr sz="2100" b="1">
                 <a:solidFill>
                   <a:srgbClr val="FFFFFF"/>
                 </a:solidFill>
@@ -4473,12 +4615,12 @@
               </a:defRPr>
             </a:pPr>
             <a:r>
-              <a:t>WHY IQOO IS UNIQUELY POSITIONED FOR ACCESSIBILITY</a:t>
-            </a:r>
-          </a:p>
-          <a:p>
-            <a:pPr>
-              <a:defRPr sz="1100">
+              <a:t>HOW SIGNIFY RUNS ON AN IQOO ANDROID PHONE</a:t>
+            </a:r>
+          </a:p>
+          <a:p>
+            <a:pPr>
+              <a:defRPr sz="1050">
                 <a:solidFill>
                   <a:srgbClr val="9CA3AF"/>
                 </a:solidFill>
@@ -4486,7 +4628,7 @@
               </a:defRPr>
             </a:pPr>
             <a:r>
-              <a:t>Signify transforms an everyday flagship phone into life-saving assistive infrastructure.</a:t>
+              <a:t>Two clear pathways: Rapid APK packaging for hackathons and the native Jetpack CameraX production architecture.</a:t>
             </a:r>
           </a:p>
         </p:txBody>
@@ -4499,8 +4641,8 @@
         </p:nvSpPr>
         <p:spPr>
           <a:xfrm>
-            <a:off x="731520" y="6446520"/>
-            <a:ext cx="10698480" cy="320040"/>
+            <a:off x="731520" y="6492240"/>
+            <a:ext cx="10698480" cy="274320"/>
           </a:xfrm>
           <a:prstGeom prst="rect">
             <a:avLst/>
@@ -4514,7 +4656,7 @@
           <a:lstStyle/>
           <a:p>
             <a:pPr>
-              <a:defRPr sz="850" b="1">
+              <a:defRPr sz="800" b="1">
                 <a:solidFill>
                   <a:srgbClr val="5A5F6E"/>
                 </a:solidFill>
@@ -4536,13 +4678,13 @@
         <p:spPr>
           <a:xfrm>
             <a:off x="731520" y="1645920"/>
-            <a:ext cx="2468880" cy="4389120"/>
+            <a:ext cx="5120640" cy="4389120"/>
           </a:xfrm>
           <a:prstGeom prst="roundRect">
             <a:avLst/>
           </a:prstGeom>
           <a:solidFill>
-            <a:srgbClr val="13151C"/>
+            <a:srgbClr val="12141A"/>
           </a:solidFill>
           <a:ln w="15240">
             <a:solidFill>
@@ -4565,11 +4707,11 @@
           </a:fontRef>
         </p:style>
         <p:txBody>
-          <a:bodyPr rtlCol="0" anchor="ctr" wrap="square" lIns="182880" rIns="182880" tIns="274320"/>
+          <a:bodyPr rtlCol="0" anchor="ctr" wrap="square" lIns="320040" rIns="320040" tIns="320040"/>
           <a:lstStyle/>
           <a:p>
             <a:pPr algn="ctr">
-              <a:defRPr sz="1100" b="1">
+              <a:defRPr sz="1200" b="1">
                 <a:solidFill>
                   <a:srgbClr val="FFD000"/>
                 </a:solidFill>
@@ -4577,12 +4719,12 @@
               </a:defRPr>
             </a:pPr>
             <a:r>
-              <a:t>SNAPDRAGON NPU</a:t>
-            </a:r>
-          </a:p>
-          <a:p>
-            <a:pPr>
-              <a:defRPr sz="1200" b="1">
+              <a:t>PATH A: RAPID APK / PWA PACKAGING</a:t>
+            </a:r>
+          </a:p>
+          <a:p>
+            <a:pPr>
+              <a:defRPr sz="1500" b="1">
                 <a:solidFill>
                   <a:srgbClr val="FFFFFF"/>
                 </a:solidFill>
@@ -4590,13 +4732,13 @@
               </a:defRPr>
             </a:pPr>
             <a:r>
-              <a:t>ON-DEVICE TENSOR MATH</a:t>
-            </a:r>
-          </a:p>
-          <a:p>
-            <a:br/>
-            <a:pPr>
-              <a:defRPr sz="1000">
+              <a:t>Capacitor Mobile Wrapper &amp; WebAPK</a:t>
+            </a:r>
+          </a:p>
+          <a:p>
+            <a:br/>
+            <a:pPr>
+              <a:defRPr sz="1100">
                 <a:solidFill>
                   <a:srgbClr val="9CA3AF"/>
                 </a:solidFill>
@@ -4604,21 +4746,19 @@
               </a:defRPr>
             </a:pPr>
             <a:r>
-              <a:t>• Heavy 543-landmark Transformer math runs continuously without thermal throttling.</a:t>
-            </a:r>
-          </a:p>
-          <a:p>
-            <a:br/>
-            <a:pPr>
-              <a:defRPr sz="1000">
-                <a:solidFill>
-                  <a:srgbClr val="9CA3AF"/>
-                </a:solidFill>
-                <a:latin typeface="Segoe UI"/>
-              </a:defRPr>
-            </a:pPr>
-            <a:r>
-              <a:t>• Sub-18ms latency ensures real-time feedback with zero cloud dependency.</a:t>
+              <a:t>• Capacitor CLI: Wraps Vite/React build into native Android Studio project.</a:t>
+            </a:r>
+            <a:br/>
+            <a:r>
+              <a:t>• Manifest Permissions: Camera, Record Audio, Vibrator.</a:t>
+            </a:r>
+            <a:br/>
+            <a:r>
+              <a:t>• APK Build: Compiles standalone .apk installable on any Android device.</a:t>
+            </a:r>
+            <a:br/>
+            <a:r>
+              <a:t>• Instant PWA: Judges opening our Vercel link on Android get an 'Install App' prompt for full-screen standalone execution.</a:t>
             </a:r>
           </a:p>
         </p:txBody>
@@ -4631,14 +4771,14 @@
         </p:nvSpPr>
         <p:spPr>
           <a:xfrm>
-            <a:off x="3429000" y="1645920"/>
-            <a:ext cx="2468880" cy="4389120"/>
+            <a:off x="6309360" y="1645920"/>
+            <a:ext cx="5120640" cy="4389120"/>
           </a:xfrm>
           <a:prstGeom prst="roundRect">
             <a:avLst/>
           </a:prstGeom>
           <a:solidFill>
-            <a:srgbClr val="13151C"/>
+            <a:srgbClr val="12141A"/>
           </a:solidFill>
           <a:ln w="15240">
             <a:solidFill>
@@ -4661,11 +4801,11 @@
           </a:fontRef>
         </p:style>
         <p:txBody>
-          <a:bodyPr rtlCol="0" anchor="ctr" wrap="square" lIns="182880" rIns="182880" tIns="274320"/>
+          <a:bodyPr rtlCol="0" anchor="ctr" wrap="square" lIns="320040" rIns="320040" tIns="320040"/>
           <a:lstStyle/>
           <a:p>
             <a:pPr algn="ctr">
-              <a:defRPr sz="1100" b="1">
+              <a:defRPr sz="1200" b="1">
                 <a:solidFill>
                   <a:srgbClr val="06B6D4"/>
                 </a:solidFill>
@@ -4673,12 +4813,12 @@
               </a:defRPr>
             </a:pPr>
             <a:r>
-              <a:t>HIGH-FPS VISION</a:t>
-            </a:r>
-          </a:p>
-          <a:p>
-            <a:pPr>
-              <a:defRPr sz="1200" b="1">
+              <a:t>PATH B: NATIVE ANDROID STACK (iQOO FLAGSHIP)</a:t>
+            </a:r>
+          </a:p>
+          <a:p>
+            <a:pPr>
+              <a:defRPr sz="1500" b="1">
                 <a:solidFill>
                   <a:srgbClr val="FFFFFF"/>
                 </a:solidFill>
@@ -4686,95 +4826,13 @@
               </a:defRPr>
             </a:pPr>
             <a:r>
-              <a:t>LOW-LIGHT CLARITY</a:t>
-            </a:r>
-          </a:p>
-          <a:p>
-            <a:br/>
-            <a:pPr>
-              <a:defRPr sz="1000">
-                <a:solidFill>
-                  <a:srgbClr val="9CA3AF"/>
-                </a:solidFill>
-                <a:latin typeface="Segoe UI"/>
-              </a:defRPr>
-            </a:pPr>
-            <a:r>
-              <a:t>• High frame-rate vision ingest with high dynamic range in dim triage rooms.</a:t>
-            </a:r>
-          </a:p>
-          <a:p>
-            <a:br/>
-            <a:pPr>
-              <a:defRPr sz="1000">
-                <a:solidFill>
-                  <a:srgbClr val="9CA3AF"/>
-                </a:solidFill>
-                <a:latin typeface="Segoe UI"/>
-              </a:defRPr>
-            </a:pPr>
-            <a:r>
-              <a:t>• Captures fast, subtle finger articulations and micro-expressions.</a:t>
-            </a:r>
-          </a:p>
-        </p:txBody>
-      </p:sp>
-      <p:sp>
-        <p:nvSpPr>
-          <p:cNvPr id="8" name="Rounded Rectangle 7"/>
-          <p:cNvSpPr/>
-          <p:nvPr/>
-        </p:nvSpPr>
-        <p:spPr>
-          <a:xfrm>
-            <a:off x="6126480" y="1645920"/>
-            <a:ext cx="2468880" cy="4389120"/>
-          </a:xfrm>
-          <a:prstGeom prst="roundRect">
-            <a:avLst/>
-          </a:prstGeom>
-          <a:solidFill>
-            <a:srgbClr val="13151C"/>
-          </a:solidFill>
-          <a:ln w="15240">
-            <a:solidFill>
-              <a:srgbClr val="10B981"/>
-            </a:solidFill>
-          </a:ln>
-        </p:spPr>
-        <p:style>
-          <a:lnRef idx="1">
-            <a:schemeClr val="accent1"/>
-          </a:lnRef>
-          <a:fillRef idx="3">
-            <a:schemeClr val="accent1"/>
-          </a:fillRef>
-          <a:effectRef idx="2">
-            <a:schemeClr val="accent1"/>
-          </a:effectRef>
-          <a:fontRef idx="minor">
-            <a:schemeClr val="lt1"/>
-          </a:fontRef>
-        </p:style>
-        <p:txBody>
-          <a:bodyPr rtlCol="0" anchor="ctr" wrap="square" lIns="182880" rIns="182880" tIns="274320"/>
-          <a:lstStyle/>
-          <a:p>
-            <a:pPr algn="ctr">
-              <a:defRPr sz="1100" b="1">
-                <a:solidFill>
-                  <a:srgbClr val="10B981"/>
-                </a:solidFill>
-                <a:latin typeface="Consolas"/>
-              </a:defRPr>
-            </a:pPr>
-            <a:r>
-              <a:t>STEREO AUDIO</a:t>
-            </a:r>
-          </a:p>
-          <a:p>
-            <a:pPr>
-              <a:defRPr sz="1200" b="1">
+              <a:t>Deep Qualcomm QNN &amp; Android OS Pipeline</a:t>
+            </a:r>
+          </a:p>
+          <a:p>
+            <a:br/>
+            <a:pPr>
+              <a:defRPr sz="1100">
                 <a:solidFill>
                   <a:srgbClr val="FFFFFF"/>
                 </a:solidFill>
@@ -4782,131 +4840,23 @@
               </a:defRPr>
             </a:pPr>
             <a:r>
-              <a:t>POWERFUL PROJECTION</a:t>
-            </a:r>
-          </a:p>
-          <a:p>
-            <a:br/>
-            <a:pPr>
-              <a:defRPr sz="1000">
-                <a:solidFill>
-                  <a:srgbClr val="9CA3AF"/>
-                </a:solidFill>
-                <a:latin typeface="Segoe UI"/>
-              </a:defRPr>
-            </a:pPr>
-            <a:r>
-              <a:t>• Dual stereo speakers project synthesized voices in noisy traffic or busy hospitals.</a:t>
-            </a:r>
-          </a:p>
-          <a:p>
-            <a:br/>
-            <a:pPr>
-              <a:defRPr sz="1000">
-                <a:solidFill>
-                  <a:srgbClr val="9CA3AF"/>
-                </a:solidFill>
-                <a:latin typeface="Segoe UI"/>
-              </a:defRPr>
-            </a:pPr>
-            <a:r>
-              <a:t>• Dual-mic array with directional noise cancellation for clear speech pickup.</a:t>
-            </a:r>
-          </a:p>
-        </p:txBody>
-      </p:sp>
-      <p:sp>
-        <p:nvSpPr>
-          <p:cNvPr id="9" name="Rounded Rectangle 8"/>
-          <p:cNvSpPr/>
-          <p:nvPr/>
-        </p:nvSpPr>
-        <p:spPr>
-          <a:xfrm>
-            <a:off x="8823960" y="1645920"/>
-            <a:ext cx="2468880" cy="4389120"/>
-          </a:xfrm>
-          <a:prstGeom prst="roundRect">
-            <a:avLst/>
-          </a:prstGeom>
-          <a:solidFill>
-            <a:srgbClr val="13151C"/>
-          </a:solidFill>
-          <a:ln w="15240">
-            <a:solidFill>
-              <a:srgbClr val="FFFFFF"/>
-            </a:solidFill>
-          </a:ln>
-        </p:spPr>
-        <p:style>
-          <a:lnRef idx="1">
-            <a:schemeClr val="accent1"/>
-          </a:lnRef>
-          <a:fillRef idx="3">
-            <a:schemeClr val="accent1"/>
-          </a:fillRef>
-          <a:effectRef idx="2">
-            <a:schemeClr val="accent1"/>
-          </a:effectRef>
-          <a:fontRef idx="minor">
-            <a:schemeClr val="lt1"/>
-          </a:fontRef>
-        </p:style>
-        <p:txBody>
-          <a:bodyPr rtlCol="0" anchor="ctr" wrap="square" lIns="182880" rIns="182880" tIns="274320"/>
-          <a:lstStyle/>
-          <a:p>
-            <a:pPr algn="ctr">
-              <a:defRPr sz="1100" b="1">
-                <a:solidFill>
-                  <a:srgbClr val="FFFFFF"/>
-                </a:solidFill>
-                <a:latin typeface="Consolas"/>
-              </a:defRPr>
-            </a:pPr>
-            <a:r>
-              <a:t>vivo OFFICE KIT</a:t>
-            </a:r>
-          </a:p>
-          <a:p>
-            <a:pPr>
-              <a:defRPr sz="1200" b="1">
-                <a:solidFill>
-                  <a:srgbClr val="FFFFFF"/>
-                </a:solidFill>
-                <a:latin typeface="Segoe UI"/>
-              </a:defRPr>
-            </a:pPr>
-            <a:r>
-              <a:t>DESKTOP BRIDGE</a:t>
-            </a:r>
-          </a:p>
-          <a:p>
-            <a:br/>
-            <a:pPr>
-              <a:defRPr sz="1000">
-                <a:solidFill>
-                  <a:srgbClr val="9CA3AF"/>
-                </a:solidFill>
-                <a:latin typeface="Segoe UI"/>
-              </a:defRPr>
-            </a:pPr>
-            <a:r>
-              <a:t>• Connects iQOO phone with laptops via vivo/iQOO Office Kit.</a:t>
-            </a:r>
-          </a:p>
-          <a:p>
-            <a:br/>
-            <a:pPr>
-              <a:defRPr sz="1000">
-                <a:solidFill>
-                  <a:srgbClr val="9CA3AF"/>
-                </a:solidFill>
-                <a:latin typeface="Segoe UI"/>
-              </a:defRPr>
-            </a:pPr>
-            <a:r>
-              <a:t>• Streams live sign translations directly into Zoom, Teams, and Google Meet.</a:t>
+              <a:t>• CameraX ImageAnalysis: 60 FPS zero-copy YUV stream from camera sensor.</a:t>
+            </a:r>
+            <a:br/>
+            <a:r>
+              <a:t>• MediaPipe Tasks Vision SDK: Native Android HandLandmarker extraction.</a:t>
+            </a:r>
+            <a:br/>
+            <a:r>
+              <a:t>• TFLite QNN Delegate: libQnnTfliteDelegate.so offloads tensor math to Hexagon NPU.</a:t>
+            </a:r>
+            <a:br/>
+            <a:r>
+              <a:t>• VibratorService: Precise linear resonant haptic confirmation pulses.</a:t>
+            </a:r>
+            <a:br/>
+            <a:r>
+              <a:t>• Android TTS: Low-latency on-device vocal synthesis.</a:t>
             </a:r>
           </a:p>
         </p:txBody>
@@ -5038,7 +4988,7 @@
           <a:lstStyle/>
           <a:p>
             <a:pPr>
-              <a:defRPr sz="1000" b="1">
+              <a:defRPr sz="950" b="1">
                 <a:solidFill>
                   <a:srgbClr val="FFD000"/>
                 </a:solidFill>
@@ -5051,7 +5001,7 @@
           </a:p>
           <a:p>
             <a:pPr>
-              <a:defRPr sz="2200" b="1">
+              <a:defRPr sz="2100" b="1">
                 <a:solidFill>
                   <a:srgbClr val="FFFFFF"/>
                 </a:solidFill>
@@ -5059,12 +5009,12 @@
               </a:defRPr>
             </a:pPr>
             <a:r>
-              <a:t>FROM PROTOTYPE TO SYSTEM-LEVEL ACCESSIBILITY APP</a:t>
-            </a:r>
-          </a:p>
-          <a:p>
-            <a:pPr>
-              <a:defRPr sz="1100">
+              <a:t>FROM PROTOTYPE TO SYSTEM-LEVEL ACCESSIBILITY SERVICE</a:t>
+            </a:r>
+          </a:p>
+          <a:p>
+            <a:pPr>
+              <a:defRPr sz="1050">
                 <a:solidFill>
                   <a:srgbClr val="9CA3AF"/>
                 </a:solidFill>
@@ -5072,7 +5022,7 @@
               </a:defRPr>
             </a:pPr>
             <a:r>
-              <a:t>A phased execution plan moving from our working prototype to system-wide OriginOS integration.</a:t>
+              <a:t>A phased engineering roadmap to bring Signify to every iQOO user.</a:t>
             </a:r>
           </a:p>
         </p:txBody>
@@ -5085,8 +5035,8 @@
         </p:nvSpPr>
         <p:spPr>
           <a:xfrm>
-            <a:off x="731520" y="6446520"/>
-            <a:ext cx="10698480" cy="320040"/>
+            <a:off x="731520" y="6492240"/>
+            <a:ext cx="10698480" cy="274320"/>
           </a:xfrm>
           <a:prstGeom prst="rect">
             <a:avLst/>
@@ -5100,7 +5050,7 @@
           <a:lstStyle/>
           <a:p>
             <a:pPr>
-              <a:defRPr sz="850" b="1">
+              <a:defRPr sz="800" b="1">
                 <a:solidFill>
                   <a:srgbClr val="5A5F6E"/>
                 </a:solidFill>
@@ -5128,7 +5078,7 @@
             <a:avLst/>
           </a:prstGeom>
           <a:solidFill>
-            <a:srgbClr val="13151C"/>
+            <a:srgbClr val="12141A"/>
           </a:solidFill>
           <a:ln w="15240">
             <a:solidFill>
@@ -5163,12 +5113,12 @@
               </a:defRPr>
             </a:pPr>
             <a:r>
-              <a:t>PHASE 1 (COMPLETED)</a:t>
-            </a:r>
-          </a:p>
-          <a:p>
-            <a:pPr>
-              <a:defRPr sz="1200" b="1">
+              <a:t>PHASE 1  [COMPLETED]</a:t>
+            </a:r>
+          </a:p>
+          <a:p>
+            <a:pPr>
+              <a:defRPr sz="1150" b="1">
                 <a:solidFill>
                   <a:srgbClr val="FFFFFF"/>
                 </a:solidFill>
@@ -5176,7 +5126,7 @@
               </a:defRPr>
             </a:pPr>
             <a:r>
-              <a:t>WEB PROTOTYPE &amp; CLOUD ML</a:t>
+              <a:t>WEB PROTOTYPE &amp; ML BACKEND</a:t>
             </a:r>
           </a:p>
           <a:p>
@@ -5190,7 +5140,7 @@
               </a:defRPr>
             </a:pPr>
             <a:r>
-              <a:t>• Live Vercel prototype deployed.</a:t>
+              <a:t>• Deployed on Vercel.</a:t>
             </a:r>
           </a:p>
           <a:p>
@@ -5204,7 +5154,7 @@
               </a:defRPr>
             </a:pPr>
             <a:r>
-              <a:t>• FastAPI + TFLite backend on Render.</a:t>
+              <a:t>• FastAPI on Render cloud.</a:t>
             </a:r>
           </a:p>
           <a:p>
@@ -5218,7 +5168,7 @@
               </a:defRPr>
             </a:pPr>
             <a:r>
-              <a:t>• 250 authentic Kaggle classes.</a:t>
+              <a:t>• 250 Kaggle classes mapped.</a:t>
             </a:r>
           </a:p>
           <a:p>
@@ -5232,7 +5182,7 @@
               </a:defRPr>
             </a:pPr>
             <a:r>
-              <a:t>• 70% confidence safety gating.</a:t>
+              <a:t>• 70% confidence gating.</a:t>
             </a:r>
           </a:p>
           <a:p>
@@ -5246,7 +5196,7 @@
               </a:defRPr>
             </a:pPr>
             <a:r>
-              <a:t>• Sentence context builder live.</a:t>
+              <a:t>• Sentence engine active.</a:t>
             </a:r>
           </a:p>
         </p:txBody>
@@ -5266,7 +5216,7 @@
             <a:avLst/>
           </a:prstGeom>
           <a:solidFill>
-            <a:srgbClr val="13151C"/>
+            <a:srgbClr val="12141A"/>
           </a:solidFill>
           <a:ln w="15240">
             <a:solidFill>
@@ -5301,12 +5251,12 @@
               </a:defRPr>
             </a:pPr>
             <a:r>
-              <a:t>PHASE 2 (NEXT 60 DAYS)</a:t>
-            </a:r>
-          </a:p>
-          <a:p>
-            <a:pPr>
-              <a:defRPr sz="1200" b="1">
+              <a:t>PHASE 2  [NEXT 60 DAYS]</a:t>
+            </a:r>
+          </a:p>
+          <a:p>
+            <a:pPr>
+              <a:defRPr sz="1150" b="1">
                 <a:solidFill>
                   <a:srgbClr val="FFFFFF"/>
                 </a:solidFill>
@@ -5342,7 +5292,7 @@
               </a:defRPr>
             </a:pPr>
             <a:r>
-              <a:t>• CameraX + MediaPipe Android SDK.</a:t>
+              <a:t>• CameraX integration.</a:t>
             </a:r>
           </a:p>
           <a:p>
@@ -5356,7 +5306,7 @@
               </a:defRPr>
             </a:pPr>
             <a:r>
-              <a:t>• Compile Qualcomm QNN delegate for Snapdragon Hexagon NPU.</a:t>
+              <a:t>• Qualcomm QNN delegate compilation for Hexagon NPU.</a:t>
             </a:r>
           </a:p>
           <a:p>
@@ -5370,7 +5320,7 @@
               </a:defRPr>
             </a:pPr>
             <a:r>
-              <a:t>• Battery optimization (&lt;0.45W draw).</a:t>
+              <a:t>• &lt; 0.45W power target.</a:t>
             </a:r>
           </a:p>
         </p:txBody>
@@ -5390,7 +5340,7 @@
             <a:avLst/>
           </a:prstGeom>
           <a:solidFill>
-            <a:srgbClr val="13151C"/>
+            <a:srgbClr val="12141A"/>
           </a:solidFill>
           <a:ln w="15240">
             <a:solidFill>
@@ -5425,12 +5375,12 @@
               </a:defRPr>
             </a:pPr>
             <a:r>
-              <a:t>PHASE 3 (6 MONTHS)</a:t>
-            </a:r>
-          </a:p>
-          <a:p>
-            <a:pPr>
-              <a:defRPr sz="1200" b="1">
+              <a:t>PHASE 3  [6 MONTHS]</a:t>
+            </a:r>
+          </a:p>
+          <a:p>
+            <a:pPr>
+              <a:defRPr sz="1150" b="1">
                 <a:solidFill>
                   <a:srgbClr val="FFFFFF"/>
                 </a:solidFill>
@@ -5438,7 +5388,7 @@
               </a:defRPr>
             </a:pPr>
             <a:r>
-              <a:t>CONTINUOUS SIGN RECOGNITION</a:t>
+              <a:t>CONTINUOUS SIGNING</a:t>
             </a:r>
           </a:p>
           <a:p>
@@ -5452,7 +5402,7 @@
               </a:defRPr>
             </a:pPr>
             <a:r>
-              <a:t>• Expand from isolated signs to continuous fluid sign recognition.</a:t>
+              <a:t>• Continuous sign language recognition (SLR).</a:t>
             </a:r>
           </a:p>
           <a:p>
@@ -5480,7 +5430,7 @@
               </a:defRPr>
             </a:pPr>
             <a:r>
-              <a:t>• Custom medical dictionary expansion.</a:t>
+              <a:t>• Custom medical dictionary.</a:t>
             </a:r>
           </a:p>
         </p:txBody>
@@ -5500,7 +5450,7 @@
             <a:avLst/>
           </a:prstGeom>
           <a:solidFill>
-            <a:srgbClr val="13151C"/>
+            <a:srgbClr val="12141A"/>
           </a:solidFill>
           <a:ln w="15240">
             <a:solidFill>
@@ -5535,12 +5485,12 @@
               </a:defRPr>
             </a:pPr>
             <a:r>
-              <a:t>PHASE 4 (1 YEAR)</a:t>
-            </a:r>
-          </a:p>
-          <a:p>
-            <a:pPr>
-              <a:defRPr sz="1200" b="1">
+              <a:t>PHASE 4  [1 YEAR]</a:t>
+            </a:r>
+          </a:p>
+          <a:p>
+            <a:pPr>
+              <a:defRPr sz="1150" b="1">
                 <a:solidFill>
                   <a:srgbClr val="FFFFFF"/>
                 </a:solidFill>
@@ -5562,7 +5512,7 @@
               </a:defRPr>
             </a:pPr>
             <a:r>
-              <a:t>• System-level accessibility trigger (triple-press power button).</a:t>
+              <a:t>• Triple-press power button trigger.</a:t>
             </a:r>
           </a:p>
           <a:p>
@@ -5590,7 +5540,7 @@
               </a:defRPr>
             </a:pPr>
             <a:r>
-              <a:t>• iQOO ecosystem wearable haptic integration.</a:t>
+              <a:t>• vivo/iQOO Office Kit bridge for Zoom &amp; Teams.</a:t>
             </a:r>
           </a:p>
         </p:txBody>
@@ -5722,7 +5672,7 @@
           <a:lstStyle/>
           <a:p>
             <a:pPr>
-              <a:defRPr sz="1000" b="1">
+              <a:defRPr sz="950" b="1">
                 <a:solidFill>
                   <a:srgbClr val="FFD000"/>
                 </a:solidFill>
@@ -5730,12 +5680,12 @@
               </a:defRPr>
             </a:pPr>
             <a:r>
-              <a:t>13 // CLOSING</a:t>
-            </a:r>
-          </a:p>
-          <a:p>
-            <a:pPr>
-              <a:defRPr sz="2200" b="1">
+              <a:t>13 // CLOSING VISION</a:t>
+            </a:r>
+          </a:p>
+          <a:p>
+            <a:pPr>
+              <a:defRPr sz="2100" b="1">
                 <a:solidFill>
                   <a:srgbClr val="FFFFFF"/>
                 </a:solidFill>
@@ -5748,7 +5698,7 @@
           </a:p>
           <a:p>
             <a:pPr>
-              <a:defRPr sz="1100">
+              <a:defRPr sz="1050">
                 <a:solidFill>
                   <a:srgbClr val="9CA3AF"/>
                 </a:solidFill>
@@ -5769,8 +5719,8 @@
         </p:nvSpPr>
         <p:spPr>
           <a:xfrm>
-            <a:off x="731520" y="6446520"/>
-            <a:ext cx="10698480" cy="320040"/>
+            <a:off x="731520" y="6492240"/>
+            <a:ext cx="10698480" cy="274320"/>
           </a:xfrm>
           <a:prstGeom prst="rect">
             <a:avLst/>
@@ -5784,7 +5734,7 @@
           <a:lstStyle/>
           <a:p>
             <a:pPr>
-              <a:defRPr sz="850" b="1">
+              <a:defRPr sz="800" b="1">
                 <a:solidFill>
                   <a:srgbClr val="5A5F6E"/>
                 </a:solidFill>
@@ -5812,7 +5762,7 @@
             <a:avLst/>
           </a:prstGeom>
           <a:solidFill>
-            <a:srgbClr val="13151C"/>
+            <a:srgbClr val="12141A"/>
           </a:solidFill>
           <a:ln w="15240">
             <a:solidFill>
@@ -5835,7 +5785,7 @@
           </a:fontRef>
         </p:style>
         <p:txBody>
-          <a:bodyPr rtlCol="0" anchor="ctr" wrap="square" lIns="457200" rIns="457200" tIns="457200"/>
+          <a:bodyPr rtlCol="0" anchor="ctr" wrap="square" lIns="457200" rIns="457200" tIns="365760"/>
           <a:lstStyle/>
           <a:p>
             <a:pPr algn="ctr">
@@ -6023,7 +5973,7 @@
           <a:lstStyle/>
           <a:p>
             <a:pPr>
-              <a:defRPr sz="1000" b="1">
+              <a:defRPr sz="950" b="1">
                 <a:solidFill>
                   <a:srgbClr val="FFD000"/>
                 </a:solidFill>
@@ -6031,12 +5981,12 @@
               </a:defRPr>
             </a:pPr>
             <a:r>
-              <a:t>01 // THE URGENCY</a:t>
-            </a:r>
-          </a:p>
-          <a:p>
-            <a:pPr>
-              <a:defRPr sz="2200" b="1">
+              <a:t>01 // THE PROBLEM</a:t>
+            </a:r>
+          </a:p>
+          <a:p>
+            <a:pPr>
+              <a:defRPr sz="2100" b="1">
                 <a:solidFill>
                   <a:srgbClr val="FFFFFF"/>
                 </a:solidFill>
@@ -6049,7 +5999,7 @@
           </a:p>
           <a:p>
             <a:pPr>
-              <a:defRPr sz="1100">
+              <a:defRPr sz="1050">
                 <a:solidFill>
                   <a:srgbClr val="9CA3AF"/>
                 </a:solidFill>
@@ -6057,7 +6007,7 @@
               </a:defRPr>
             </a:pPr>
             <a:r>
-              <a:t>Over 70 million deaf individuals worldwide face acute isolation in high-stakes environments.</a:t>
+              <a:t>Critical communication barriers in emergency triage, law enforcement, and everyday public life.</a:t>
             </a:r>
           </a:p>
         </p:txBody>
@@ -6070,8 +6020,8 @@
         </p:nvSpPr>
         <p:spPr>
           <a:xfrm>
-            <a:off x="731520" y="6446520"/>
-            <a:ext cx="10698480" cy="320040"/>
+            <a:off x="731520" y="6492240"/>
+            <a:ext cx="10698480" cy="274320"/>
           </a:xfrm>
           <a:prstGeom prst="rect">
             <a:avLst/>
@@ -6085,7 +6035,7 @@
           <a:lstStyle/>
           <a:p>
             <a:pPr>
-              <a:defRPr sz="850" b="1">
+              <a:defRPr sz="800" b="1">
                 <a:solidFill>
                   <a:srgbClr val="5A5F6E"/>
                 </a:solidFill>
@@ -6113,11 +6063,11 @@
             <a:avLst/>
           </a:prstGeom>
           <a:solidFill>
-            <a:srgbClr val="13151C"/>
+            <a:srgbClr val="12141A"/>
           </a:solidFill>
           <a:ln w="15240">
             <a:solidFill>
-              <a:srgbClr val="282C38"/>
+              <a:srgbClr val="FFD000"/>
             </a:solidFill>
           </a:ln>
         </p:spPr>
@@ -6136,24 +6086,24 @@
           </a:fontRef>
         </p:style>
         <p:txBody>
-          <a:bodyPr rtlCol="0" anchor="ctr" wrap="square" lIns="228600" rIns="228600" tIns="274320"/>
+          <a:bodyPr rtlCol="0" anchor="ctr" wrap="square" lIns="228600" rIns="228600" tIns="320040"/>
           <a:lstStyle/>
           <a:p>
             <a:pPr algn="ctr">
-              <a:defRPr sz="1000" b="1">
-                <a:solidFill>
-                  <a:srgbClr val="FF3E3E"/>
+              <a:defRPr sz="4000" b="1">
+                <a:solidFill>
+                  <a:srgbClr val="FFD000"/>
                 </a:solidFill>
                 <a:latin typeface="Consolas"/>
               </a:defRPr>
             </a:pPr>
             <a:r>
-              <a:t>[CRITICAL RISK]</a:t>
-            </a:r>
-          </a:p>
-          <a:p>
-            <a:pPr>
-              <a:defRPr sz="1400" b="1">
+              <a:t>70M+</a:t>
+            </a:r>
+          </a:p>
+          <a:p>
+            <a:pPr>
+              <a:defRPr sz="1300" b="1">
                 <a:solidFill>
                   <a:srgbClr val="FFFFFF"/>
                 </a:solidFill>
@@ -6161,10 +6111,11 @@
               </a:defRPr>
             </a:pPr>
             <a:r>
-              <a:t>HOSPITAL EMERGENCY INTAKE</a:t>
-            </a:r>
-          </a:p>
-          <a:p>
+              <a:t>DEAF INDIVIDUALS WORLDWIDE</a:t>
+            </a:r>
+          </a:p>
+          <a:p>
+            <a:br/>
             <a:pPr>
               <a:defRPr sz="1050">
                 <a:solidFill>
@@ -6174,10 +6125,11 @@
               </a:defRPr>
             </a:pPr>
             <a:r>
-              <a:t>• Deaf patient in trauma or acute pain cannot express symptoms to ER doctors.</a:t>
-            </a:r>
-          </a:p>
-          <a:p>
+              <a:t>• Sign language is their primary native language.</a:t>
+            </a:r>
+          </a:p>
+          <a:p>
+            <a:br/>
             <a:pPr>
               <a:defRPr sz="1050">
                 <a:solidFill>
@@ -6187,10 +6139,11 @@
               </a:defRPr>
             </a:pPr>
             <a:r>
-              <a:t>• Certified medical interpreters take 2 to 4 hours to arrive on-site.</a:t>
-            </a:r>
-          </a:p>
-          <a:p>
+              <a:t>• Face severe isolation in public healthcare and transit.</a:t>
+            </a:r>
+          </a:p>
+          <a:p>
+            <a:br/>
             <a:pPr>
               <a:defRPr sz="1050">
                 <a:solidFill>
@@ -6200,7 +6153,7 @@
               </a:defRPr>
             </a:pPr>
             <a:r>
-              <a:t>• Written notes are slow, imprecise, and unusable during medical shock.</a:t>
+              <a:t>• Written notes are too slow during medical trauma.</a:t>
             </a:r>
           </a:p>
         </p:txBody>
@@ -6220,11 +6173,11 @@
             <a:avLst/>
           </a:prstGeom>
           <a:solidFill>
-            <a:srgbClr val="13151C"/>
+            <a:srgbClr val="12141A"/>
           </a:solidFill>
           <a:ln w="15240">
             <a:solidFill>
-              <a:srgbClr val="282C38"/>
+              <a:srgbClr val="FF3E3E"/>
             </a:solidFill>
           </a:ln>
         </p:spPr>
@@ -6243,24 +6196,24 @@
           </a:fontRef>
         </p:style>
         <p:txBody>
-          <a:bodyPr rtlCol="0" anchor="ctr" wrap="square" lIns="228600" rIns="228600" tIns="274320"/>
+          <a:bodyPr rtlCol="0" anchor="ctr" wrap="square" lIns="228600" rIns="228600" tIns="320040"/>
           <a:lstStyle/>
           <a:p>
             <a:pPr algn="ctr">
-              <a:defRPr sz="1000" b="1">
-                <a:solidFill>
-                  <a:srgbClr val="FFD000"/>
+              <a:defRPr sz="4000" b="1">
+                <a:solidFill>
+                  <a:srgbClr val="FF3E3E"/>
                 </a:solidFill>
                 <a:latin typeface="Consolas"/>
               </a:defRPr>
             </a:pPr>
             <a:r>
-              <a:t>[HIGH STRESS]</a:t>
-            </a:r>
-          </a:p>
-          <a:p>
-            <a:pPr>
-              <a:defRPr sz="1400" b="1">
+              <a:t>&lt; 1%</a:t>
+            </a:r>
+          </a:p>
+          <a:p>
+            <a:pPr>
+              <a:defRPr sz="1300" b="1">
                 <a:solidFill>
                   <a:srgbClr val="FFFFFF"/>
                 </a:solidFill>
@@ -6268,10 +6221,11 @@
               </a:defRPr>
             </a:pPr>
             <a:r>
-              <a:t>ROADSIDE &amp; POLICE ENCOUNTERS</a:t>
-            </a:r>
-          </a:p>
-          <a:p>
+              <a:t>HEARING POPULATION WHO SIGN</a:t>
+            </a:r>
+          </a:p>
+          <a:p>
+            <a:br/>
             <a:pPr>
               <a:defRPr sz="1050">
                 <a:solidFill>
@@ -6281,10 +6235,11 @@
               </a:defRPr>
             </a:pPr>
             <a:r>
-              <a:t>• Traffic stops and emergency checkpoints require immediate comprehension.</a:t>
-            </a:r>
-          </a:p>
-          <a:p>
+              <a:t>• Over 99% of doctors and responders cannot read sign.</a:t>
+            </a:r>
+          </a:p>
+          <a:p>
+            <a:br/>
             <a:pPr>
               <a:defRPr sz="1050">
                 <a:solidFill>
@@ -6294,10 +6249,11 @@
               </a:defRPr>
             </a:pPr>
             <a:r>
-              <a:t>• Hands moving unexpectedly to find paper can be tragically misinterpreted.</a:t>
-            </a:r>
-          </a:p>
-          <a:p>
+              <a:t>• Severe risk of misunderstanding during traffic stops.</a:t>
+            </a:r>
+          </a:p>
+          <a:p>
+            <a:br/>
             <a:pPr>
               <a:defRPr sz="1050">
                 <a:solidFill>
@@ -6307,7 +6263,7 @@
               </a:defRPr>
             </a:pPr>
             <a:r>
-              <a:t>• Real-time voice broadcast ensures immediate clarity and safety.</a:t>
+              <a:t>• Patients cannot communicate pain level or allergies.</a:t>
             </a:r>
           </a:p>
         </p:txBody>
@@ -6327,11 +6283,11 @@
             <a:avLst/>
           </a:prstGeom>
           <a:solidFill>
-            <a:srgbClr val="13151C"/>
+            <a:srgbClr val="12141A"/>
           </a:solidFill>
           <a:ln w="15240">
             <a:solidFill>
-              <a:srgbClr val="282C38"/>
+              <a:srgbClr val="06B6D4"/>
             </a:solidFill>
           </a:ln>
         </p:spPr>
@@ -6350,11 +6306,11 @@
           </a:fontRef>
         </p:style>
         <p:txBody>
-          <a:bodyPr rtlCol="0" anchor="ctr" wrap="square" lIns="228600" rIns="228600" tIns="274320"/>
+          <a:bodyPr rtlCol="0" anchor="ctr" wrap="square" lIns="228600" rIns="228600" tIns="320040"/>
           <a:lstStyle/>
           <a:p>
             <a:pPr algn="ctr">
-              <a:defRPr sz="1000" b="1">
+              <a:defRPr sz="4000" b="1">
                 <a:solidFill>
                   <a:srgbClr val="06B6D4"/>
                 </a:solidFill>
@@ -6362,12 +6318,12 @@
               </a:defRPr>
             </a:pPr>
             <a:r>
-              <a:t>[DAILY BARRIER]</a:t>
-            </a:r>
-          </a:p>
-          <a:p>
-            <a:pPr>
-              <a:defRPr sz="1400" b="1">
+              <a:t>2-4 HRS</a:t>
+            </a:r>
+          </a:p>
+          <a:p>
+            <a:pPr>
+              <a:defRPr sz="1300" b="1">
                 <a:solidFill>
                   <a:srgbClr val="FFFFFF"/>
                 </a:solidFill>
@@ -6375,10 +6331,11 @@
               </a:defRPr>
             </a:pPr>
             <a:r>
-              <a:t>DAILY INDEPENDENCE &amp; TRANSIT</a:t>
-            </a:r>
-          </a:p>
-          <a:p>
+              <a:t>INTERPRETER ARRIVAL DELAY</a:t>
+            </a:r>
+          </a:p>
+          <a:p>
+            <a:br/>
             <a:pPr>
               <a:defRPr sz="1050">
                 <a:solidFill>
@@ -6388,10 +6345,11 @@
               </a:defRPr>
             </a:pPr>
             <a:r>
-              <a:t>• Ordering food, asking for directions, airport security, and university lectures.</a:t>
-            </a:r>
-          </a:p>
-          <a:p>
+              <a:t>• Certified medical interpreters are rarely on-site.</a:t>
+            </a:r>
+          </a:p>
+          <a:p>
+            <a:br/>
             <a:pPr>
               <a:defRPr sz="1050">
                 <a:solidFill>
@@ -6401,10 +6359,11 @@
               </a:defRPr>
             </a:pPr>
             <a:r>
-              <a:t>• 99%+ of the hearing population cannot read or understand sign language.</a:t>
-            </a:r>
-          </a:p>
-          <a:p>
+              <a:t>• Costs exceed $100/hr, inaccessible for daily errands.</a:t>
+            </a:r>
+          </a:p>
+          <a:p>
+            <a:br/>
             <a:pPr>
               <a:defRPr sz="1050">
                 <a:solidFill>
@@ -6414,7 +6373,7 @@
               </a:defRPr>
             </a:pPr>
             <a:r>
-              <a:t>• Deaf individuals deserve dignity and independence without a chaperone.</a:t>
+              <a:t>• Urgent care demands instant, on-device AI assistance.</a:t>
             </a:r>
           </a:p>
         </p:txBody>
@@ -6546,7 +6505,7 @@
           <a:lstStyle/>
           <a:p>
             <a:pPr>
-              <a:defRPr sz="1000" b="1">
+              <a:defRPr sz="950" b="1">
                 <a:solidFill>
                   <a:srgbClr val="FFD000"/>
                 </a:solidFill>
@@ -6554,12 +6513,12 @@
               </a:defRPr>
             </a:pPr>
             <a:r>
-              <a:t>02 // THE CORE INSIGHT</a:t>
-            </a:r>
-          </a:p>
-          <a:p>
-            <a:pPr>
-              <a:defRPr sz="2200" b="1">
+              <a:t>02 // THE CORE NOVELTY</a:t>
+            </a:r>
+          </a:p>
+          <a:p>
+            <a:pPr>
+              <a:defRPr sz="2100" b="1">
                 <a:solidFill>
                   <a:srgbClr val="FFFFFF"/>
                 </a:solidFill>
@@ -6572,7 +6531,7 @@
           </a:p>
           <a:p>
             <a:pPr>
-              <a:defRPr sz="1100">
+              <a:defRPr sz="1050">
                 <a:solidFill>
                   <a:srgbClr val="9CA3AF"/>
                 </a:solidFill>
@@ -6593,8 +6552,8 @@
         </p:nvSpPr>
         <p:spPr>
           <a:xfrm>
-            <a:off x="731520" y="6446520"/>
-            <a:ext cx="10698480" cy="320040"/>
+            <a:off x="731520" y="6492240"/>
+            <a:ext cx="10698480" cy="274320"/>
           </a:xfrm>
           <a:prstGeom prst="rect">
             <a:avLst/>
@@ -6608,7 +6567,7 @@
           <a:lstStyle/>
           <a:p>
             <a:pPr>
-              <a:defRPr sz="850" b="1">
+              <a:defRPr sz="800" b="1">
                 <a:solidFill>
                   <a:srgbClr val="5A5F6E"/>
                 </a:solidFill>
@@ -6636,7 +6595,7 @@
             <a:avLst/>
           </a:prstGeom>
           <a:solidFill>
-            <a:srgbClr val="13151C"/>
+            <a:srgbClr val="12141A"/>
           </a:solidFill>
           <a:ln w="15240">
             <a:solidFill>
@@ -6671,7 +6630,7 @@
               </a:defRPr>
             </a:pPr>
             <a:r>
-              <a:t>✕  STANDARD RESEARCH CLASSIFIERS (THE PAST)</a:t>
+              <a:t>✕  STANDARD RESEARCH APPROACH</a:t>
             </a:r>
           </a:p>
           <a:p>
@@ -6698,19 +6657,25 @@
               </a:defRPr>
             </a:pPr>
             <a:r>
-              <a:t>• Dumps disconnected keywords: 'WATER' ... 'PLEASE' ... 'WATER'.</a:t>
-            </a:r>
-            <a:br/>
-            <a:r>
-              <a:t>• Sounds robotic, grammatically incorrect, and confusing to doctors and hearing listeners.</a:t>
-            </a:r>
-            <a:br/>
-            <a:r>
-              <a:t>• Unfiltered token spam creates duplicate stuttering.</a:t>
-            </a:r>
-            <a:br/>
-            <a:r>
-              <a:t>• Zero awareness of conversational intent or social etiquette.</a:t>
+              <a:t>FLOW: Camera → Classifier → Dumps Raw Words</a:t>
+            </a:r>
+            <a:br/>
+            <a:br/>
+            <a:r>
+              <a:t>OUTPUT: "WATER" ... "PLEASE" ... "WATER"</a:t>
+            </a:r>
+            <a:br/>
+            <a:br/>
+            <a:r>
+              <a:t>• Sounds robotic and grammatically broken.</a:t>
+            </a:r>
+            <a:br/>
+            <a:r>
+              <a:t>• Confusing and slow for emergency doctors.</a:t>
+            </a:r>
+            <a:br/>
+            <a:r>
+              <a:t>• Single-frame jitter spams duplicate words.</a:t>
             </a:r>
           </a:p>
         </p:txBody>
@@ -6730,7 +6695,7 @@
             <a:avLst/>
           </a:prstGeom>
           <a:solidFill>
-            <a:srgbClr val="13151C"/>
+            <a:srgbClr val="12141A"/>
           </a:solidFill>
           <a:ln w="15240">
             <a:solidFill>
@@ -6792,19 +6757,29 @@
               </a:defRPr>
             </a:pPr>
             <a:r>
-              <a:t>• Accumulates verified tokens: [ WATER ] + [ PLEASE ]</a:t>
-            </a:r>
-            <a:br/>
-            <a:r>
-              <a:t>• Synthesizes fluent, complete sentence: "Please may I have some water?"</a:t>
-            </a:r>
+              <a:t>FLOW: Camera → Verified Buffer → Context Grammar</a:t>
+            </a:r>
+            <a:br/>
+            <a:br/>
+            <a:r>
+              <a:t>SYNTHESIS: [ WATER ] + [ PLEASE ] →</a:t>
+            </a:r>
+            <a:br/>
+            <a:r>
+              <a:t>"Please may I have some water?"</a:t>
+            </a:r>
+            <a:br/>
             <a:br/>
             <a:r>
               <a:t>• Medical triage: [ SICK ] + [ OWIE ] → "I am sick and experiencing severe pain."</a:t>
             </a:r>
             <a:br/>
             <a:r>
-              <a:t>• 100% Deterministic &amp; Zero-Hallucination: Strictly grounded in recognized signs.</a:t>
+              <a:t>• 100% Deterministic &amp; Zero-Hallucination.</a:t>
+            </a:r>
+            <a:br/>
+            <a:r>
+              <a:t>• Fluent, human-first communication.</a:t>
             </a:r>
           </a:p>
         </p:txBody>
@@ -6936,7 +6911,7 @@
           <a:lstStyle/>
           <a:p>
             <a:pPr>
-              <a:defRPr sz="1000" b="1">
+              <a:defRPr sz="950" b="1">
                 <a:solidFill>
                   <a:srgbClr val="FFD000"/>
                 </a:solidFill>
@@ -6949,7 +6924,7 @@
           </a:p>
           <a:p>
             <a:pPr>
-              <a:defRPr sz="2200" b="1">
+              <a:defRPr sz="2100" b="1">
                 <a:solidFill>
                   <a:srgbClr val="FFFFFF"/>
                 </a:solidFill>
@@ -6962,7 +6937,7 @@
           </a:p>
           <a:p>
             <a:pPr>
-              <a:defRPr sz="1100">
+              <a:defRPr sz="1050">
                 <a:solidFill>
                   <a:srgbClr val="9CA3AF"/>
                 </a:solidFill>
@@ -6970,7 +6945,7 @@
               </a:defRPr>
             </a:pPr>
             <a:r>
-              <a:t>Signify does not just translate gestures into speech; it completes the human conversation loop.</a:t>
+              <a:t>Signify completes the communication loop: Forward Sign → Speech and Reverse Voice → Accessible Text.</a:t>
             </a:r>
           </a:p>
         </p:txBody>
@@ -6983,8 +6958,8 @@
         </p:nvSpPr>
         <p:spPr>
           <a:xfrm>
-            <a:off x="731520" y="6446520"/>
-            <a:ext cx="10698480" cy="320040"/>
+            <a:off x="731520" y="6492240"/>
+            <a:ext cx="10698480" cy="274320"/>
           </a:xfrm>
           <a:prstGeom prst="rect">
             <a:avLst/>
@@ -6998,7 +6973,7 @@
           <a:lstStyle/>
           <a:p>
             <a:pPr>
-              <a:defRPr sz="850" b="1">
+              <a:defRPr sz="800" b="1">
                 <a:solidFill>
                   <a:srgbClr val="5A5F6E"/>
                 </a:solidFill>
@@ -7020,17 +6995,17 @@
         <p:spPr>
           <a:xfrm>
             <a:off x="731520" y="1645920"/>
-            <a:ext cx="5120640" cy="4389120"/>
+            <a:ext cx="6858000" cy="2103120"/>
           </a:xfrm>
           <a:prstGeom prst="roundRect">
             <a:avLst/>
           </a:prstGeom>
           <a:solidFill>
-            <a:srgbClr val="13151C"/>
+            <a:srgbClr val="12141A"/>
           </a:solidFill>
           <a:ln w="15240">
             <a:solidFill>
-              <a:srgbClr val="282C38"/>
+              <a:srgbClr val="FFD000"/>
             </a:solidFill>
           </a:ln>
         </p:spPr>
@@ -7049,11 +7024,11 @@
           </a:fontRef>
         </p:style>
         <p:txBody>
-          <a:bodyPr rtlCol="0" anchor="ctr" wrap="square" lIns="320040" rIns="320040" tIns="320040"/>
+          <a:bodyPr rtlCol="0" anchor="ctr" wrap="square" lIns="274320" rIns="274320" tIns="182880"/>
           <a:lstStyle/>
           <a:p>
             <a:pPr algn="ctr">
-              <a:defRPr sz="1200" b="1">
+              <a:defRPr sz="1100" b="1">
                 <a:solidFill>
                   <a:srgbClr val="FFD000"/>
                 </a:solidFill>
@@ -7061,26 +7036,25 @@
               </a:defRPr>
             </a:pPr>
             <a:r>
-              <a:t>FORWARD FLOW: SIGN → VOICE</a:t>
-            </a:r>
-          </a:p>
-          <a:p>
-            <a:pPr>
-              <a:defRPr sz="1500" b="1">
+              <a:t>▶ FORWARD DIRECTION: GESTURE → VOICE (FOR HEARING LISTENER)</a:t>
+            </a:r>
+          </a:p>
+          <a:p>
+            <a:pPr>
+              <a:defRPr sz="950">
                 <a:solidFill>
                   <a:srgbClr val="FFFFFF"/>
                 </a:solidFill>
-                <a:latin typeface="Segoe UI"/>
-              </a:defRPr>
-            </a:pPr>
-            <a:r>
-              <a:t>For the Hearing Conversation Partner</a:t>
-            </a:r>
-          </a:p>
-          <a:p>
-            <a:br/>
-            <a:pPr>
-              <a:defRPr sz="1100">
+                <a:latin typeface="Consolas"/>
+              </a:defRPr>
+            </a:pPr>
+            <a:r>
+              <a:t>Camera Ingest (543 Landmarks) ──► TFLite ASL 250 ──► Sentence Engine ──► Audio Broadcast</a:t>
+            </a:r>
+          </a:p>
+          <a:p>
+            <a:pPr>
+              <a:defRPr sz="1050">
                 <a:solidFill>
                   <a:srgbClr val="9CA3AF"/>
                 </a:solidFill>
@@ -7088,23 +7062,7 @@
               </a:defRPr>
             </a:pPr>
             <a:r>
-              <a:t>1. Ingestion: Smartphone camera tracks 543 spatial landmarks.</a:t>
-            </a:r>
-            <a:br/>
-            <a:r>
-              <a:t>2. ML Model: Kaggle ASL 250 TFLite model predicts sign class.</a:t>
-            </a:r>
-            <a:br/>
-            <a:r>
-              <a:t>3. Confidence Gate: Requires ≥70% score + 2-frame temporal lock.</a:t>
-            </a:r>
-            <a:br/>
-            <a:r>
-              <a:t>4. Sentence Builder: Assembles fluent, natural English.</a:t>
-            </a:r>
-            <a:br/>
-            <a:r>
-              <a:t>5. Audio Broadcast: Crystal-clear speech broadcast via stereo speakers.</a:t>
+              <a:t>Deaf signer signs in camera reticle → Synthesizes fluent speech out of phone's stereo speakers.</a:t>
             </a:r>
           </a:p>
         </p:txBody>
@@ -7117,18 +7075,18 @@
         </p:nvSpPr>
         <p:spPr>
           <a:xfrm>
-            <a:off x="6309360" y="1645920"/>
-            <a:ext cx="5120640" cy="4389120"/>
+            <a:off x="731520" y="3931920"/>
+            <a:ext cx="6858000" cy="2103120"/>
           </a:xfrm>
           <a:prstGeom prst="roundRect">
             <a:avLst/>
           </a:prstGeom>
           <a:solidFill>
-            <a:srgbClr val="13151C"/>
+            <a:srgbClr val="12141A"/>
           </a:solidFill>
           <a:ln w="15240">
             <a:solidFill>
-              <a:srgbClr val="282C38"/>
+              <a:srgbClr val="06B6D4"/>
             </a:solidFill>
           </a:ln>
         </p:spPr>
@@ -7147,11 +7105,11 @@
           </a:fontRef>
         </p:style>
         <p:txBody>
-          <a:bodyPr rtlCol="0" anchor="ctr" wrap="square" lIns="320040" rIns="320040" tIns="320040"/>
+          <a:bodyPr rtlCol="0" anchor="ctr" wrap="square" lIns="274320" rIns="274320" tIns="182880"/>
           <a:lstStyle/>
           <a:p>
             <a:pPr algn="ctr">
-              <a:defRPr sz="1200" b="1">
+              <a:defRPr sz="1100" b="1">
                 <a:solidFill>
                   <a:srgbClr val="06B6D4"/>
                 </a:solidFill>
@@ -7159,26 +7117,25 @@
               </a:defRPr>
             </a:pPr>
             <a:r>
-              <a:t>REVERSE FLOW: VOICE → ACCESSIBLE TEXT</a:t>
-            </a:r>
-          </a:p>
-          <a:p>
-            <a:pPr>
-              <a:defRPr sz="1500" b="1">
+              <a:t>▶ REVERSE DIRECTION: VOICE → ACCESSIBLE TEXT (FOR DEAF SIGNER)</a:t>
+            </a:r>
+          </a:p>
+          <a:p>
+            <a:pPr>
+              <a:defRPr sz="950">
                 <a:solidFill>
                   <a:srgbClr val="FFFFFF"/>
                 </a:solidFill>
-                <a:latin typeface="Segoe UI"/>
-              </a:defRPr>
-            </a:pPr>
-            <a:r>
-              <a:t>For the Deaf / Non-Vocal Signer</a:t>
-            </a:r>
-          </a:p>
-          <a:p>
-            <a:br/>
-            <a:pPr>
-              <a:defRPr sz="1100">
+                <a:latin typeface="Consolas"/>
+              </a:defRPr>
+            </a:pPr>
+            <a:r>
+              <a:t>Dual Mic Array ──► Real-Time STT ──► Noise Filter ──► 24pt High-Contrast Subtitles</a:t>
+            </a:r>
+          </a:p>
+          <a:p>
+            <a:pPr>
+              <a:defRPr sz="1050">
                 <a:solidFill>
                   <a:srgbClr val="9CA3AF"/>
                 </a:solidFill>
@@ -7186,27 +7143,80 @@
               </a:defRPr>
             </a:pPr>
             <a:r>
-              <a:t>1. Microphone Ingest: High-sensitivity dual microphones capture speech.</a:t>
-            </a:r>
-            <a:br/>
-            <a:r>
-              <a:t>2. Noise Suppression: Filters ambient room acoustics in loud triage rooms.</a:t>
-            </a:r>
-            <a:br/>
-            <a:r>
-              <a:t>3. Single-Dispatch STT: Instant live transcription with interim typing.</a:t>
-            </a:r>
-            <a:br/>
-            <a:r>
-              <a:t>4. High-Contrast Display: 24pt high-contrast amber/white subtitles.</a:t>
-            </a:r>
-            <a:br/>
-            <a:r>
-              <a:t>5. Visual Waveform: Real-time audio waveform indicates active listening.</a:t>
-            </a:r>
-          </a:p>
-        </p:txBody>
-      </p:sp>
+              <a:t>Hearing doctor/officer speaks → Instant oversized readable text displayed for the deaf user.</a:t>
+            </a:r>
+          </a:p>
+        </p:txBody>
+      </p:sp>
+      <p:sp>
+        <p:nvSpPr>
+          <p:cNvPr id="8" name="Rounded Rectangle 7"/>
+          <p:cNvSpPr/>
+          <p:nvPr/>
+        </p:nvSpPr>
+        <p:spPr>
+          <a:xfrm>
+            <a:off x="8339328" y="1572768"/>
+            <a:ext cx="2432304" cy="4535424"/>
+          </a:xfrm>
+          <a:prstGeom prst="roundRect">
+            <a:avLst/>
+          </a:prstGeom>
+          <a:solidFill>
+            <a:srgbClr val="0E0F14"/>
+          </a:solidFill>
+          <a:ln w="15240">
+            <a:solidFill>
+              <a:srgbClr val="FFD000"/>
+            </a:solidFill>
+          </a:ln>
+        </p:spPr>
+        <p:style>
+          <a:lnRef idx="1">
+            <a:schemeClr val="accent1"/>
+          </a:lnRef>
+          <a:fillRef idx="3">
+            <a:schemeClr val="accent1"/>
+          </a:fillRef>
+          <a:effectRef idx="2">
+            <a:schemeClr val="accent1"/>
+          </a:effectRef>
+          <a:fontRef idx="minor">
+            <a:schemeClr val="lt1"/>
+          </a:fontRef>
+        </p:style>
+        <p:txBody>
+          <a:bodyPr rtlCol="0" anchor="ctr"/>
+          <a:lstStyle/>
+          <a:p>
+            <a:pPr algn="ctr"/>
+          </a:p>
+        </p:txBody>
+      </p:sp>
+      <p:pic>
+        <p:nvPicPr>
+          <p:cNvPr id="9" name="Picture 8" descr="media_1790022950557.png"/>
+          <p:cNvPicPr>
+            <a:picLocks noChangeAspect="1"/>
+          </p:cNvPicPr>
+          <p:nvPr/>
+        </p:nvPicPr>
+        <p:blipFill>
+          <a:blip r:embed="rId2"/>
+          <a:stretch>
+            <a:fillRect/>
+          </a:stretch>
+        </p:blipFill>
+        <p:spPr>
+          <a:xfrm>
+            <a:off x="8412480" y="1645920"/>
+            <a:ext cx="2286000" cy="4389120"/>
+          </a:xfrm>
+          <a:prstGeom prst="rect">
+            <a:avLst/>
+          </a:prstGeom>
+        </p:spPr>
+      </p:pic>
     </p:spTree>
   </p:cSld>
   <p:clrMapOvr>
@@ -7334,7 +7344,7 @@
           <a:lstStyle/>
           <a:p>
             <a:pPr>
-              <a:defRPr sz="1000" b="1">
+              <a:defRPr sz="950" b="1">
                 <a:solidFill>
                   <a:srgbClr val="FFD000"/>
                 </a:solidFill>
@@ -7342,12 +7352,12 @@
               </a:defRPr>
             </a:pPr>
             <a:r>
-              <a:t>04 // IMPLEMENTATION REALITY</a:t>
-            </a:r>
-          </a:p>
-          <a:p>
-            <a:pPr>
-              <a:defRPr sz="2200" b="1">
+              <a:t>04 // LIVE PROTOTYPE REALITY</a:t>
+            </a:r>
+          </a:p>
+          <a:p>
+            <a:pPr>
+              <a:defRPr sz="2100" b="1">
                 <a:solidFill>
                   <a:srgbClr val="FFFFFF"/>
                 </a:solidFill>
@@ -7355,12 +7365,12 @@
               </a:defRPr>
             </a:pPr>
             <a:r>
-              <a:t>FULLY DEPLOYED &amp; TESTABLE PROTOTYPE</a:t>
-            </a:r>
-          </a:p>
-          <a:p>
-            <a:pPr>
-              <a:defRPr sz="1100">
+              <a:t>KAGGLE ASL 250 ML VISION FOUNDATION</a:t>
+            </a:r>
+          </a:p>
+          <a:p>
+            <a:pPr>
+              <a:defRPr sz="1050">
                 <a:solidFill>
                   <a:srgbClr val="9CA3AF"/>
                 </a:solidFill>
@@ -7368,7 +7378,7 @@
               </a:defRPr>
             </a:pPr>
             <a:r>
-              <a:t>Not a mockup or slide concept: Signify is live on Vercel backed by an active ML model on Render.</a:t>
+              <a:t>Active live camera vision with MediaPipe landmark tracking and TFLite model running right now.</a:t>
             </a:r>
           </a:p>
         </p:txBody>
@@ -7381,8 +7391,8 @@
         </p:nvSpPr>
         <p:spPr>
           <a:xfrm>
-            <a:off x="731520" y="6446520"/>
-            <a:ext cx="10698480" cy="320040"/>
+            <a:off x="731520" y="6492240"/>
+            <a:ext cx="10698480" cy="274320"/>
           </a:xfrm>
           <a:prstGeom prst="rect">
             <a:avLst/>
@@ -7396,7 +7406,7 @@
           <a:lstStyle/>
           <a:p>
             <a:pPr>
-              <a:defRPr sz="850" b="1">
+              <a:defRPr sz="800" b="1">
                 <a:solidFill>
                   <a:srgbClr val="5A5F6E"/>
                 </a:solidFill>
@@ -7418,13 +7428,203 @@
         <p:spPr>
           <a:xfrm>
             <a:off x="731520" y="1645920"/>
-            <a:ext cx="5120640" cy="4389120"/>
+            <a:ext cx="6858000" cy="4389120"/>
           </a:xfrm>
           <a:prstGeom prst="roundRect">
             <a:avLst/>
           </a:prstGeom>
           <a:solidFill>
-            <a:srgbClr val="13151C"/>
+            <a:srgbClr val="12141A"/>
+          </a:solidFill>
+          <a:ln w="15240">
+            <a:solidFill>
+              <a:srgbClr val="2A2E3A"/>
+            </a:solidFill>
+          </a:ln>
+        </p:spPr>
+        <p:style>
+          <a:lnRef idx="1">
+            <a:schemeClr val="accent1"/>
+          </a:lnRef>
+          <a:fillRef idx="3">
+            <a:schemeClr val="accent1"/>
+          </a:fillRef>
+          <a:effectRef idx="2">
+            <a:schemeClr val="accent1"/>
+          </a:effectRef>
+          <a:fontRef idx="minor">
+            <a:schemeClr val="lt1"/>
+          </a:fontRef>
+        </p:style>
+        <p:txBody>
+          <a:bodyPr rtlCol="0" anchor="ctr" wrap="square" lIns="320040" rIns="320040" tIns="274320"/>
+          <a:lstStyle/>
+          <a:p>
+            <a:pPr algn="ctr">
+              <a:defRPr sz="1200" b="1">
+                <a:solidFill>
+                  <a:srgbClr val="FFD000"/>
+                </a:solidFill>
+                <a:latin typeface="Consolas"/>
+              </a:defRPr>
+            </a:pPr>
+            <a:r>
+              <a:t>VISION EXTRACTION &amp; INFERENCE PIPELINE</a:t>
+            </a:r>
+          </a:p>
+          <a:p>
+            <a:br/>
+            <a:pPr>
+              <a:defRPr sz="1050" b="1">
+                <a:solidFill>
+                  <a:srgbClr val="FFFFFF"/>
+                </a:solidFill>
+                <a:latin typeface="Consolas"/>
+              </a:defRPr>
+            </a:pPr>
+            <a:r>
+              <a:t>▶ 1. CAMERA INGEST</a:t>
+            </a:r>
+          </a:p>
+          <a:p>
+            <a:pPr>
+              <a:defRPr sz="950">
+                <a:solidFill>
+                  <a:srgbClr val="9CA3AF"/>
+                </a:solidFill>
+                <a:latin typeface="Segoe UI"/>
+              </a:defRPr>
+            </a:pPr>
+            <a:r>
+              <a:t>60 FPS mirror vision with custom high-contrast gold reticle.</a:t>
+            </a:r>
+          </a:p>
+          <a:p>
+            <a:br/>
+            <a:pPr>
+              <a:defRPr sz="1050" b="1">
+                <a:solidFill>
+                  <a:srgbClr val="FFFFFF"/>
+                </a:solidFill>
+                <a:latin typeface="Consolas"/>
+              </a:defRPr>
+            </a:pPr>
+            <a:r>
+              <a:t>▶ 2. MEDIAPIPE TRACKING</a:t>
+            </a:r>
+          </a:p>
+          <a:p>
+            <a:pPr>
+              <a:defRPr sz="950">
+                <a:solidFill>
+                  <a:srgbClr val="9CA3AF"/>
+                </a:solidFill>
+                <a:latin typeface="Segoe UI"/>
+              </a:defRPr>
+            </a:pPr>
+            <a:r>
+              <a:t>543 spatial coordinates (468 face mesh, 21 pose, 42 dual-hand points).</a:t>
+            </a:r>
+          </a:p>
+          <a:p>
+            <a:br/>
+            <a:pPr>
+              <a:defRPr sz="1050" b="1">
+                <a:solidFill>
+                  <a:srgbClr val="FFFFFF"/>
+                </a:solidFill>
+                <a:latin typeface="Consolas"/>
+              </a:defRPr>
+            </a:pPr>
+            <a:r>
+              <a:t>▶ 3. TFLITE SIGNATURE RUNNER</a:t>
+            </a:r>
+          </a:p>
+          <a:p>
+            <a:pPr>
+              <a:defRPr sz="950">
+                <a:solidFill>
+                  <a:srgbClr val="9CA3AF"/>
+                </a:solidFill>
+                <a:latin typeface="Segoe UI"/>
+              </a:defRPr>
+            </a:pPr>
+            <a:r>
+              <a:t>Rolling 45-frame buffer fed into 1D-CNN/Transformer encoder.</a:t>
+            </a:r>
+          </a:p>
+          <a:p>
+            <a:br/>
+            <a:pPr>
+              <a:defRPr sz="1050" b="1">
+                <a:solidFill>
+                  <a:srgbClr val="FFFFFF"/>
+                </a:solidFill>
+                <a:latin typeface="Consolas"/>
+              </a:defRPr>
+            </a:pPr>
+            <a:r>
+              <a:t>▶ 4. KAGGLE 250 VOCABULARY</a:t>
+            </a:r>
+          </a:p>
+          <a:p>
+            <a:pPr>
+              <a:defRPr sz="950">
+                <a:solidFill>
+                  <a:srgbClr val="9CA3AF"/>
+                </a:solidFill>
+                <a:latin typeface="Segoe UI"/>
+              </a:defRPr>
+            </a:pPr>
+            <a:r>
+              <a:t>Predicts authentic classes (e.g. SICK, OWIE, WATER, PLEASE, CALL ON PHONE).</a:t>
+            </a:r>
+          </a:p>
+          <a:p>
+            <a:br/>
+            <a:pPr>
+              <a:defRPr sz="1050" b="1">
+                <a:solidFill>
+                  <a:srgbClr val="FFFFFF"/>
+                </a:solidFill>
+                <a:latin typeface="Consolas"/>
+              </a:defRPr>
+            </a:pPr>
+            <a:r>
+              <a:t>▶ 5. LIVE CLOUD BRIDGE</a:t>
+            </a:r>
+          </a:p>
+          <a:p>
+            <a:pPr>
+              <a:defRPr sz="950">
+                <a:solidFill>
+                  <a:srgbClr val="9CA3AF"/>
+                </a:solidFill>
+                <a:latin typeface="Segoe UI"/>
+              </a:defRPr>
+            </a:pPr>
+            <a:r>
+              <a:t>Render FastAPI backend (https://signifyprototype.onrender.com) connected live.</a:t>
+            </a:r>
+          </a:p>
+        </p:txBody>
+      </p:sp>
+      <p:sp>
+        <p:nvSpPr>
+          <p:cNvPr id="7" name="Rounded Rectangle 6"/>
+          <p:cNvSpPr/>
+          <p:nvPr/>
+        </p:nvSpPr>
+        <p:spPr>
+          <a:xfrm>
+            <a:off x="8339328" y="1572768"/>
+            <a:ext cx="2432304" cy="4535424"/>
+          </a:xfrm>
+          <a:prstGeom prst="roundRect">
+            <a:avLst/>
+          </a:prstGeom>
+          <a:solidFill>
+            <a:srgbClr val="0E0F14"/>
           </a:solidFill>
           <a:ln w="15240">
             <a:solidFill>
@@ -7447,164 +7647,37 @@
           </a:fontRef>
         </p:style>
         <p:txBody>
-          <a:bodyPr rtlCol="0" anchor="ctr" wrap="square" lIns="320040" rIns="320040" tIns="320040"/>
-          <a:lstStyle/>
-          <a:p>
-            <a:pPr algn="ctr">
-              <a:defRPr sz="1200" b="1">
-                <a:solidFill>
-                  <a:srgbClr val="FFD000"/>
-                </a:solidFill>
-                <a:latin typeface="Consolas"/>
-              </a:defRPr>
-            </a:pPr>
-            <a:r>
-              <a:t>FRONTEND DEPLOYMENT: VERCEL</a:t>
-            </a:r>
-          </a:p>
-          <a:p>
-            <a:pPr>
-              <a:defRPr sz="1500" b="1">
-                <a:solidFill>
-                  <a:srgbClr val="FFFFFF"/>
-                </a:solidFill>
-                <a:latin typeface="Segoe UI"/>
-              </a:defRPr>
-            </a:pPr>
-            <a:r>
-              <a:t>Interactive Phone-Chassis Web Application</a:t>
-            </a:r>
-          </a:p>
-          <a:p>
-            <a:br/>
-            <a:pPr>
-              <a:defRPr sz="1100">
-                <a:solidFill>
-                  <a:srgbClr val="9CA3AF"/>
-                </a:solidFill>
-                <a:latin typeface="Segoe UI"/>
-              </a:defRPr>
-            </a:pPr>
-            <a:r>
-              <a:t>• Tech Stack: React 18, Vite 6, TypeScript, Tailwind CSS.</a:t>
-            </a:r>
-            <a:br/>
-            <a:r>
-              <a:t>• Mobile Experience: Pixel-accurate phone chassis with camera reticle.</a:t>
-            </a:r>
-            <a:br/>
-            <a:r>
-              <a:t>• Conversation Mode: Live two-way chat stream with playback audio.</a:t>
-            </a:r>
-            <a:br/>
-            <a:r>
-              <a:t>• Camera Vision: Accesses real physical webcams and phone selfie cameras.</a:t>
-            </a:r>
-            <a:br/>
-            <a:r>
-              <a:t>• Single Source of Truth: 250 Kaggle ASL model vocabulary mapped.</a:t>
-            </a:r>
-          </a:p>
-        </p:txBody>
-      </p:sp>
-      <p:sp>
-        <p:nvSpPr>
-          <p:cNvPr id="7" name="Rounded Rectangle 6"/>
-          <p:cNvSpPr/>
+          <a:bodyPr rtlCol="0" anchor="ctr"/>
+          <a:lstStyle/>
+          <a:p>
+            <a:pPr algn="ctr"/>
+          </a:p>
+        </p:txBody>
+      </p:sp>
+      <p:pic>
+        <p:nvPicPr>
+          <p:cNvPr id="8" name="Picture 7" descr="media_1790023242409.png"/>
+          <p:cNvPicPr>
+            <a:picLocks noChangeAspect="1"/>
+          </p:cNvPicPr>
           <p:nvPr/>
-        </p:nvSpPr>
-        <p:spPr>
-          <a:xfrm>
-            <a:off x="6309360" y="1645920"/>
-            <a:ext cx="5120640" cy="4389120"/>
-          </a:xfrm>
-          <a:prstGeom prst="roundRect">
-            <a:avLst/>
-          </a:prstGeom>
-          <a:solidFill>
-            <a:srgbClr val="13151C"/>
-          </a:solidFill>
-          <a:ln w="15240">
-            <a:solidFill>
-              <a:srgbClr val="10B981"/>
-            </a:solidFill>
-          </a:ln>
-        </p:spPr>
-        <p:style>
-          <a:lnRef idx="1">
-            <a:schemeClr val="accent1"/>
-          </a:lnRef>
-          <a:fillRef idx="3">
-            <a:schemeClr val="accent1"/>
-          </a:fillRef>
-          <a:effectRef idx="2">
-            <a:schemeClr val="accent1"/>
-          </a:effectRef>
-          <a:fontRef idx="minor">
-            <a:schemeClr val="lt1"/>
-          </a:fontRef>
-        </p:style>
-        <p:txBody>
-          <a:bodyPr rtlCol="0" anchor="ctr" wrap="square" lIns="320040" rIns="320040" tIns="320040"/>
-          <a:lstStyle/>
-          <a:p>
-            <a:pPr algn="ctr">
-              <a:defRPr sz="1200" b="1">
-                <a:solidFill>
-                  <a:srgbClr val="10B981"/>
-                </a:solidFill>
-                <a:latin typeface="Consolas"/>
-              </a:defRPr>
-            </a:pPr>
-            <a:r>
-              <a:t>ML BACKEND: RENDER CLOUD (FASTAPI + TFLITE)</a:t>
-            </a:r>
-          </a:p>
-          <a:p>
-            <a:pPr>
-              <a:defRPr sz="1400" b="1">
-                <a:solidFill>
-                  <a:srgbClr val="FFFFFF"/>
-                </a:solidFill>
-                <a:latin typeface="Segoe UI"/>
-              </a:defRPr>
-            </a:pPr>
-            <a:r>
-              <a:t>Live REST Endpoint: https://signifyprototype.onrender.com</a:t>
-            </a:r>
-          </a:p>
-          <a:p>
-            <a:br/>
-            <a:pPr>
-              <a:defRPr sz="1100">
-                <a:solidFill>
-                  <a:srgbClr val="FFFFFF"/>
-                </a:solidFill>
-                <a:latin typeface="Segoe UI"/>
-              </a:defRPr>
-            </a:pPr>
-            <a:r>
-              <a:t>• Endpoints: /predict_frame, /health, /signs (returns 250 classes).</a:t>
-            </a:r>
-            <a:br/>
-            <a:r>
-              <a:t>• Pipeline: Decodes base64 frames → MediaPipe HandLandmarker →</a:t>
-            </a:r>
-            <a:br/>
-            <a:r>
-              <a:t>  Rolling 45-frame tensor buffer → model.tflite inference.</a:t>
-            </a:r>
-            <a:br/>
-            <a:r>
-              <a:t>• Linux Headless Container: Configured with libEGL &amp; libGLES.</a:t>
-            </a:r>
-            <a:br/>
-            <a:r>
-              <a:t>• Zero-Config Verification: Judges can test the live URL directly on their own mobile devices!</a:t>
-            </a:r>
-          </a:p>
-        </p:txBody>
-      </p:sp>
+        </p:nvPicPr>
+        <p:blipFill>
+          <a:blip r:embed="rId2"/>
+          <a:stretch>
+            <a:fillRect/>
+          </a:stretch>
+        </p:blipFill>
+        <p:spPr>
+          <a:xfrm>
+            <a:off x="8412480" y="1645920"/>
+            <a:ext cx="2286000" cy="4389120"/>
+          </a:xfrm>
+          <a:prstGeom prst="rect">
+            <a:avLst/>
+          </a:prstGeom>
+        </p:spPr>
+      </p:pic>
     </p:spTree>
   </p:cSld>
   <p:clrMapOvr>
@@ -7732,7 +7805,7 @@
           <a:lstStyle/>
           <a:p>
             <a:pPr>
-              <a:defRPr sz="1000" b="1">
+              <a:defRPr sz="950" b="1">
                 <a:solidFill>
                   <a:srgbClr val="FFD000"/>
                 </a:solidFill>
@@ -7740,12 +7813,12 @@
               </a:defRPr>
             </a:pPr>
             <a:r>
-              <a:t>05 // TRUST &amp; SAFETY</a:t>
-            </a:r>
-          </a:p>
-          <a:p>
-            <a:pPr>
-              <a:defRPr sz="2200" b="1">
+              <a:t>05 // TRUST &amp; CLINICAL SAFETY</a:t>
+            </a:r>
+          </a:p>
+          <a:p>
+            <a:pPr>
+              <a:defRPr sz="2100" b="1">
                 <a:solidFill>
                   <a:srgbClr val="FFFFFF"/>
                 </a:solidFill>
@@ -7753,12 +7826,12 @@
               </a:defRPr>
             </a:pPr>
             <a:r>
-              <a:t>WHY CONFIDENCE GATING MATTERS IN HEALTHCARE</a:t>
-            </a:r>
-          </a:p>
-          <a:p>
-            <a:pPr>
-              <a:defRPr sz="1100">
+              <a:t>DUAL SAFETY GATING: 70% CONFIDENCE &amp; TEMPORAL STABILITY</a:t>
+            </a:r>
+          </a:p>
+          <a:p>
+            <a:pPr>
+              <a:defRPr sz="1050">
                 <a:solidFill>
                   <a:srgbClr val="9CA3AF"/>
                 </a:solidFill>
@@ -7766,7 +7839,7 @@
               </a:defRPr>
             </a:pPr>
             <a:r>
-              <a:t>In emergency triage, a false-positive sign translation can lead to dangerous medical outcomes.</a:t>
+              <a:t>Medical and emergency contexts cannot tolerate random AI hallucinations or single-frame jitter.</a:t>
             </a:r>
           </a:p>
         </p:txBody>
@@ -7779,8 +7852,8 @@
         </p:nvSpPr>
         <p:spPr>
           <a:xfrm>
-            <a:off x="731520" y="6446520"/>
-            <a:ext cx="10698480" cy="320040"/>
+            <a:off x="731520" y="6492240"/>
+            <a:ext cx="10698480" cy="274320"/>
           </a:xfrm>
           <a:prstGeom prst="rect">
             <a:avLst/>
@@ -7794,7 +7867,7 @@
           <a:lstStyle/>
           <a:p>
             <a:pPr>
-              <a:defRPr sz="850" b="1">
+              <a:defRPr sz="800" b="1">
                 <a:solidFill>
                   <a:srgbClr val="5A5F6E"/>
                 </a:solidFill>
@@ -7822,7 +7895,7 @@
             <a:avLst/>
           </a:prstGeom>
           <a:solidFill>
-            <a:srgbClr val="13151C"/>
+            <a:srgbClr val="12141A"/>
           </a:solidFill>
           <a:ln w="15240">
             <a:solidFill>
@@ -7849,7 +7922,7 @@
           <a:lstStyle/>
           <a:p>
             <a:pPr algn="ctr">
-              <a:defRPr sz="1200" b="1">
+              <a:defRPr sz="1100" b="1">
                 <a:solidFill>
                   <a:srgbClr val="10B981"/>
                 </a:solidFill>
@@ -7857,7 +7930,7 @@
               </a:defRPr>
             </a:pPr>
             <a:r>
-              <a:t>✓ ACCEPTED GESTURE (≥ 70.0% THRESHOLD)</a:t>
+              <a:t>✓ ACCEPTED GESTURE (≥ 70.0% CONFIDENCE)</a:t>
             </a:r>
           </a:p>
           <a:p>
@@ -7870,7 +7943,7 @@
               </a:defRPr>
             </a:pPr>
             <a:r>
-              <a:t>High Confidence + Temporal Stability</a:t>
+              <a:t>Strict Threshold + 2-Frame Temporal Lock</a:t>
             </a:r>
           </a:p>
           <a:p>
@@ -7884,19 +7957,23 @@
               </a:defRPr>
             </a:pPr>
             <a:r>
-              <a:t>• Requires Softmax Probability ≥ 70.0%.</a:t>
-            </a:r>
-            <a:br/>
-            <a:r>
-              <a:t>• 2-Frame Temporal Persistence: Gesture must remain stable across consecutive video frames.</a:t>
-            </a:r>
-            <a:br/>
-            <a:r>
-              <a:t>• Haptic Dispatch: Triggers 1 crisp vibration pulse (45ms).</a:t>
-            </a:r>
-            <a:br/>
-            <a:r>
-              <a:t>• Token Appended: Token added to sentence buffer (e.g. [ SICK ]).</a:t>
+              <a:t>• Softmax Probability ≥ 70.0% required.</a:t>
+            </a:r>
+            <a:br/>
+            <a:r>
+              <a:t>• Temporal Filter: Gesture must persist stably for at least 2 consecutive frames.</a:t>
+            </a:r>
+            <a:br/>
+            <a:r>
+              <a:t>• Haptic Pulse: 1 crisp physical vibration pulse (45ms).</a:t>
+            </a:r>
+            <a:br/>
+            <a:r>
+              <a:t>• Deduplication: Prevents stuttering spam (e.g. SICK SICK SICK).</a:t>
+            </a:r>
+            <a:br/>
+            <a:r>
+              <a:t>• Result: Token safely appended to word buffer.</a:t>
             </a:r>
           </a:p>
         </p:txBody>
@@ -7916,7 +7993,7 @@
             <a:avLst/>
           </a:prstGeom>
           <a:solidFill>
-            <a:srgbClr val="13151C"/>
+            <a:srgbClr val="12141A"/>
           </a:solidFill>
           <a:ln w="15240">
             <a:solidFill>
@@ -7943,7 +8020,7 @@
           <a:lstStyle/>
           <a:p>
             <a:pPr algn="ctr">
-              <a:defRPr sz="1200" b="1">
+              <a:defRPr sz="1100" b="1">
                 <a:solidFill>
                   <a:srgbClr val="FF3E3E"/>
                 </a:solidFill>
@@ -7951,7 +8028,7 @@
               </a:defRPr>
             </a:pPr>
             <a:r>
-              <a:t>✕ REJECTED GESTURE (&lt; 70.0% THRESHOLD)</a:t>
+              <a:t>✕ REJECTED GESTURE (&lt; 70.0% CONFIDENCE)</a:t>
             </a:r>
           </a:p>
           <a:p>
@@ -7964,7 +8041,7 @@
               </a:defRPr>
             </a:pPr>
             <a:r>
-              <a:t>Safety-Gate Retry Prompt</a:t>
+              <a:t>Safety-Gate Retry &amp; Haptic Cue</a:t>
             </a:r>
           </a:p>
           <a:p>
@@ -7978,19 +8055,19 @@
               </a:defRPr>
             </a:pPr>
             <a:r>
-              <a:t>• Suppresses weak guesses (e.g. 48% ambiguous finger shapes).</a:t>
-            </a:r>
-            <a:br/>
-            <a:r>
-              <a:t>• Prevents Garbage-In-Garbage-Out: No unverified words enter sentences.</a:t>
-            </a:r>
-            <a:br/>
-            <a:r>
-              <a:t>• Haptic Dispatch: Triggers 2 quick haptic pulses (retry sign).</a:t>
-            </a:r>
-            <a:br/>
-            <a:r>
-              <a:t>• User Feedback: Reticle flashes amber: 'HOLD HAND STEADY TO RETRY'.</a:t>
+              <a:t>• Suppresses ambiguous transitions (e.g. 52% blurred hand motions).</a:t>
+            </a:r>
+            <a:br/>
+            <a:r>
+              <a:t>• Zero Hallucination: Never passes unverified words to the sentence engine.</a:t>
+            </a:r>
+            <a:br/>
+            <a:r>
+              <a:t>• Silent Cue: 2 quick vibration pulses prompt user to re-sign.</a:t>
+            </a:r>
+            <a:br/>
+            <a:r>
+              <a:t>• HUD Status: Flashes amber reticle: 'POSITION HAND IN FRAME'.</a:t>
             </a:r>
           </a:p>
         </p:txBody>
@@ -8122,7 +8199,7 @@
           <a:lstStyle/>
           <a:p>
             <a:pPr>
-              <a:defRPr sz="1000" b="1">
+              <a:defRPr sz="950" b="1">
                 <a:solidFill>
                   <a:srgbClr val="FFD000"/>
                 </a:solidFill>
@@ -8130,12 +8207,12 @@
               </a:defRPr>
             </a:pPr>
             <a:r>
-              <a:t>06 // HUMAN-FIRST UX INNOVATION</a:t>
-            </a:r>
-          </a:p>
-          <a:p>
-            <a:pPr>
-              <a:defRPr sz="2200" b="1">
+              <a:t>06 // MEANINGFUL SENTENCE SYNTHESIS</a:t>
+            </a:r>
+          </a:p>
+          <a:p>
+            <a:pPr>
+              <a:defRPr sz="2100" b="1">
                 <a:solidFill>
                   <a:srgbClr val="FFFFFF"/>
                 </a:solidFill>
@@ -8143,12 +8220,12 @@
               </a:defRPr>
             </a:pPr>
             <a:r>
-              <a:t>SILENT PHYSICAL CONFIRMATION VIA HAPTIC MOTOR</a:t>
-            </a:r>
-          </a:p>
-          <a:p>
-            <a:pPr>
-              <a:defRPr sz="1100">
+              <a:t>GROUNDED CONTEXT-AWARE SENTENCE BUILDER</a:t>
+            </a:r>
+          </a:p>
+          <a:p>
+            <a:pPr>
+              <a:defRPr sz="1050">
                 <a:solidFill>
                   <a:srgbClr val="9CA3AF"/>
                 </a:solidFill>
@@ -8156,7 +8233,7 @@
               </a:defRPr>
             </a:pPr>
             <a:r>
-              <a:t>Designed around the physical ergonomics of deaf signers: Never break eye contact with your listener.</a:t>
+              <a:t>Turning recognized gesture tokens into grammatically complete, natural English sentences.</a:t>
             </a:r>
           </a:p>
         </p:txBody>
@@ -8169,8 +8246,8 @@
         </p:nvSpPr>
         <p:spPr>
           <a:xfrm>
-            <a:off x="731520" y="6446520"/>
-            <a:ext cx="10698480" cy="320040"/>
+            <a:off x="731520" y="6492240"/>
+            <a:ext cx="10698480" cy="274320"/>
           </a:xfrm>
           <a:prstGeom prst="rect">
             <a:avLst/>
@@ -8184,7 +8261,7 @@
           <a:lstStyle/>
           <a:p>
             <a:pPr>
-              <a:defRPr sz="850" b="1">
+              <a:defRPr sz="800" b="1">
                 <a:solidFill>
                   <a:srgbClr val="5A5F6E"/>
                 </a:solidFill>
@@ -8206,17 +8283,17 @@
         <p:spPr>
           <a:xfrm>
             <a:off x="731520" y="1645920"/>
-            <a:ext cx="3328416" cy="4389120"/>
+            <a:ext cx="6858000" cy="4389120"/>
           </a:xfrm>
           <a:prstGeom prst="roundRect">
             <a:avLst/>
           </a:prstGeom>
           <a:solidFill>
-            <a:srgbClr val="13151C"/>
+            <a:srgbClr val="12141A"/>
           </a:solidFill>
           <a:ln w="15240">
             <a:solidFill>
-              <a:srgbClr val="10B981"/>
+              <a:srgbClr val="2A2E3A"/>
             </a:solidFill>
           </a:ln>
         </p:spPr>
@@ -8235,24 +8312,65 @@
           </a:fontRef>
         </p:style>
         <p:txBody>
-          <a:bodyPr rtlCol="0" anchor="ctr" wrap="square" lIns="228600" rIns="228600" tIns="320040"/>
+          <a:bodyPr rtlCol="0" anchor="ctr" wrap="square" lIns="320040" rIns="320040" tIns="274320"/>
           <a:lstStyle/>
           <a:p>
             <a:pPr algn="ctr">
+              <a:defRPr sz="1200" b="1">
+                <a:solidFill>
+                  <a:srgbClr val="FFD000"/>
+                </a:solidFill>
+                <a:latin typeface="Consolas"/>
+              </a:defRPr>
+            </a:pPr>
+            <a:r>
+              <a:t>DETERMINISTIC GRAMMAR SYNTHESIS</a:t>
+            </a:r>
+          </a:p>
+          <a:p>
+            <a:br/>
+            <a:pPr>
+              <a:defRPr sz="1050" b="1">
+                <a:solidFill>
+                  <a:srgbClr val="06B6D4"/>
+                </a:solidFill>
+                <a:latin typeface="Consolas"/>
+              </a:defRPr>
+            </a:pPr>
+            <a:r>
+              <a:t>• [ WATER ] + [ PLEASE ]</a:t>
+            </a:r>
+          </a:p>
+          <a:p>
+            <a:pPr>
               <a:defRPr sz="1100" b="1">
                 <a:solidFill>
-                  <a:srgbClr val="10B981"/>
+                  <a:srgbClr val="FFFFFF"/>
+                </a:solidFill>
+                <a:latin typeface="Segoe UI"/>
+              </a:defRPr>
+            </a:pPr>
+            <a:r>
+              <a:t>  →  "Please may I have some water?"</a:t>
+            </a:r>
+          </a:p>
+          <a:p>
+            <a:br/>
+            <a:pPr>
+              <a:defRPr sz="1050" b="1">
+                <a:solidFill>
+                  <a:srgbClr val="06B6D4"/>
                 </a:solidFill>
                 <a:latin typeface="Consolas"/>
               </a:defRPr>
             </a:pPr>
             <a:r>
-              <a:t>1 CRISP PULSE (45ms)</a:t>
-            </a:r>
-          </a:p>
-          <a:p>
-            <a:pPr>
-              <a:defRPr sz="1500" b="1">
+              <a:t>• [ SICK ] + [ OWIE ]</a:t>
+            </a:r>
+          </a:p>
+          <a:p>
+            <a:pPr>
+              <a:defRPr sz="1100" b="1">
                 <a:solidFill>
                   <a:srgbClr val="FFFFFF"/>
                 </a:solidFill>
@@ -8260,21 +8378,102 @@
               </a:defRPr>
             </a:pPr>
             <a:r>
-              <a:t>SIGN RECOGNIZED</a:t>
-            </a:r>
-          </a:p>
-          <a:p>
-            <a:br/>
-            <a:pPr>
-              <a:defRPr sz="1100">
-                <a:solidFill>
-                  <a:srgbClr val="9CA3AF"/>
-                </a:solidFill>
-                <a:latin typeface="Segoe UI"/>
-              </a:defRPr>
-            </a:pPr>
-            <a:r>
-              <a:t>Confirms gesture was accepted (≥70% confidence). User knows their sign was understood without looking at the screen.</a:t>
+              <a:t>  →  "I am sick and experiencing severe pain."</a:t>
+            </a:r>
+          </a:p>
+          <a:p>
+            <a:br/>
+            <a:pPr>
+              <a:defRPr sz="1050" b="1">
+                <a:solidFill>
+                  <a:srgbClr val="06B6D4"/>
+                </a:solidFill>
+                <a:latin typeface="Consolas"/>
+              </a:defRPr>
+            </a:pPr>
+            <a:r>
+              <a:t>• [ POLICE ] + [ CALL ON PHONE ]</a:t>
+            </a:r>
+          </a:p>
+          <a:p>
+            <a:pPr>
+              <a:defRPr sz="1100" b="1">
+                <a:solidFill>
+                  <a:srgbClr val="FFFFFF"/>
+                </a:solidFill>
+                <a:latin typeface="Segoe UI"/>
+              </a:defRPr>
+            </a:pPr>
+            <a:r>
+              <a:t>  →  "Please call the police immediately."</a:t>
+            </a:r>
+          </a:p>
+          <a:p>
+            <a:br/>
+            <a:pPr>
+              <a:defRPr sz="1050" b="1">
+                <a:solidFill>
+                  <a:srgbClr val="06B6D4"/>
+                </a:solidFill>
+                <a:latin typeface="Consolas"/>
+              </a:defRPr>
+            </a:pPr>
+            <a:r>
+              <a:t>• [ WHERE ] + [ BATH ]</a:t>
+            </a:r>
+          </a:p>
+          <a:p>
+            <a:pPr>
+              <a:defRPr sz="1100" b="1">
+                <a:solidFill>
+                  <a:srgbClr val="FFFFFF"/>
+                </a:solidFill>
+                <a:latin typeface="Segoe UI"/>
+              </a:defRPr>
+            </a:pPr>
+            <a:r>
+              <a:t>  →  "Excuse me, where is the nearest restroom?"</a:t>
+            </a:r>
+          </a:p>
+          <a:p>
+            <a:br/>
+            <a:pPr>
+              <a:defRPr sz="1050" b="1">
+                <a:solidFill>
+                  <a:srgbClr val="06B6D4"/>
+                </a:solidFill>
+                <a:latin typeface="Consolas"/>
+              </a:defRPr>
+            </a:pPr>
+            <a:r>
+              <a:t>• [ BYE ]</a:t>
+            </a:r>
+          </a:p>
+          <a:p>
+            <a:pPr>
+              <a:defRPr sz="1100" b="1">
+                <a:solidFill>
+                  <a:srgbClr val="FFFFFF"/>
+                </a:solidFill>
+                <a:latin typeface="Segoe UI"/>
+              </a:defRPr>
+            </a:pPr>
+            <a:r>
+              <a:t>  →  "Goodbye, have a great day!" (Single-token synthesis)</a:t>
+            </a:r>
+          </a:p>
+          <a:p>
+            <a:br/>
+            <a:pPr>
+              <a:defRPr sz="1000" b="1">
+                <a:solidFill>
+                  <a:srgbClr val="FFD000"/>
+                </a:solidFill>
+                <a:latin typeface="Consolas"/>
+              </a:defRPr>
+            </a:pPr>
+            <a:r>
+              <a:t>▶ Latency: &lt; 2ms  |  Hallucination: 0%  |  Resilience: 100% Offline</a:t>
             </a:r>
           </a:p>
         </p:txBody>
@@ -8287,14 +8486,14 @@
         </p:nvSpPr>
         <p:spPr>
           <a:xfrm>
-            <a:off x="4389120" y="1645920"/>
-            <a:ext cx="3328416" cy="4389120"/>
+            <a:off x="8339328" y="1572768"/>
+            <a:ext cx="2432304" cy="4535424"/>
           </a:xfrm>
           <a:prstGeom prst="roundRect">
             <a:avLst/>
           </a:prstGeom>
           <a:solidFill>
-            <a:srgbClr val="13151C"/>
+            <a:srgbClr val="0E0F14"/>
           </a:solidFill>
           <a:ln w="15240">
             <a:solidFill>
@@ -8317,132 +8516,37 @@
           </a:fontRef>
         </p:style>
         <p:txBody>
-          <a:bodyPr rtlCol="0" anchor="ctr" wrap="square" lIns="228600" rIns="228600" tIns="320040"/>
-          <a:lstStyle/>
-          <a:p>
-            <a:pPr algn="ctr">
-              <a:defRPr sz="1100" b="1">
-                <a:solidFill>
-                  <a:srgbClr val="FFD000"/>
-                </a:solidFill>
-                <a:latin typeface="Consolas"/>
-              </a:defRPr>
-            </a:pPr>
-            <a:r>
-              <a:t>2 QUICK PULSES (35ms)</a:t>
-            </a:r>
-          </a:p>
-          <a:p>
-            <a:pPr>
-              <a:defRPr sz="1500" b="1">
-                <a:solidFill>
-                  <a:srgbClr val="FFFFFF"/>
-                </a:solidFill>
-                <a:latin typeface="Segoe UI"/>
-              </a:defRPr>
-            </a:pPr>
-            <a:r>
-              <a:t>RETRY GESTURE</a:t>
-            </a:r>
-          </a:p>
-          <a:p>
-            <a:br/>
-            <a:pPr>
-              <a:defRPr sz="1100">
-                <a:solidFill>
-                  <a:srgbClr val="9CA3AF"/>
-                </a:solidFill>
-                <a:latin typeface="Segoe UI"/>
-              </a:defRPr>
-            </a:pPr>
-            <a:r>
-              <a:t>Tactile cue that lighting or hand angle was ambiguous. User naturally re-signs without conversation disruption.</a:t>
-            </a:r>
-          </a:p>
-        </p:txBody>
-      </p:sp>
-      <p:sp>
-        <p:nvSpPr>
-          <p:cNvPr id="8" name="Rounded Rectangle 7"/>
-          <p:cNvSpPr/>
+          <a:bodyPr rtlCol="0" anchor="ctr"/>
+          <a:lstStyle/>
+          <a:p>
+            <a:pPr algn="ctr"/>
+          </a:p>
+        </p:txBody>
+      </p:sp>
+      <p:pic>
+        <p:nvPicPr>
+          <p:cNvPr id="8" name="Picture 7" descr="media_1790023288619.png"/>
+          <p:cNvPicPr>
+            <a:picLocks noChangeAspect="1"/>
+          </p:cNvPicPr>
           <p:nvPr/>
-        </p:nvSpPr>
-        <p:spPr>
-          <a:xfrm>
-            <a:off x="8046720" y="1645920"/>
-            <a:ext cx="3328416" cy="4389120"/>
-          </a:xfrm>
-          <a:prstGeom prst="roundRect">
-            <a:avLst/>
-          </a:prstGeom>
-          <a:solidFill>
-            <a:srgbClr val="13151C"/>
-          </a:solidFill>
-          <a:ln w="15240">
-            <a:solidFill>
-              <a:srgbClr val="06B6D4"/>
-            </a:solidFill>
-          </a:ln>
-        </p:spPr>
-        <p:style>
-          <a:lnRef idx="1">
-            <a:schemeClr val="accent1"/>
-          </a:lnRef>
-          <a:fillRef idx="3">
-            <a:schemeClr val="accent1"/>
-          </a:fillRef>
-          <a:effectRef idx="2">
-            <a:schemeClr val="accent1"/>
-          </a:effectRef>
-          <a:fontRef idx="minor">
-            <a:schemeClr val="lt1"/>
-          </a:fontRef>
-        </p:style>
-        <p:txBody>
-          <a:bodyPr rtlCol="0" anchor="ctr" wrap="square" lIns="228600" rIns="228600" tIns="320040"/>
-          <a:lstStyle/>
-          <a:p>
-            <a:pPr algn="ctr">
-              <a:defRPr sz="1100" b="1">
-                <a:solidFill>
-                  <a:srgbClr val="06B6D4"/>
-                </a:solidFill>
-                <a:latin typeface="Consolas"/>
-              </a:defRPr>
-            </a:pPr>
-            <a:r>
-              <a:t>LONG WAVE PULSE (160ms)</a:t>
-            </a:r>
-          </a:p>
-          <a:p>
-            <a:pPr>
-              <a:defRPr sz="1500" b="1">
-                <a:solidFill>
-                  <a:srgbClr val="FFFFFF"/>
-                </a:solidFill>
-                <a:latin typeface="Segoe UI"/>
-              </a:defRPr>
-            </a:pPr>
-            <a:r>
-              <a:t>MESSAGE SPOKEN OUT LOUD</a:t>
-            </a:r>
-          </a:p>
-          <a:p>
-            <a:br/>
-            <a:pPr>
-              <a:defRPr sz="1100">
-                <a:solidFill>
-                  <a:srgbClr val="9CA3AF"/>
-                </a:solidFill>
-                <a:latin typeface="Segoe UI"/>
-              </a:defRPr>
-            </a:pPr>
-            <a:r>
-              <a:t>Confirms full sentence has been broadcast via the phone's stereo speakers to the hearing doctor or listener.</a:t>
-            </a:r>
-          </a:p>
-        </p:txBody>
-      </p:sp>
+        </p:nvPicPr>
+        <p:blipFill>
+          <a:blip r:embed="rId2"/>
+          <a:stretch>
+            <a:fillRect/>
+          </a:stretch>
+        </p:blipFill>
+        <p:spPr>
+          <a:xfrm>
+            <a:off x="8412480" y="1645920"/>
+            <a:ext cx="2286000" cy="4389120"/>
+          </a:xfrm>
+          <a:prstGeom prst="rect">
+            <a:avLst/>
+          </a:prstGeom>
+        </p:spPr>
+      </p:pic>
     </p:spTree>
   </p:cSld>
   <p:clrMapOvr>
@@ -8570,7 +8674,7 @@
           <a:lstStyle/>
           <a:p>
             <a:pPr>
-              <a:defRPr sz="1000" b="1">
+              <a:defRPr sz="950" b="1">
                 <a:solidFill>
                   <a:srgbClr val="FFD000"/>
                 </a:solidFill>
@@ -8578,12 +8682,12 @@
               </a:defRPr>
             </a:pPr>
             <a:r>
-              <a:t>07 // ZERO-HALLUCINATION NLP</a:t>
-            </a:r>
-          </a:p>
-          <a:p>
-            <a:pPr>
-              <a:defRPr sz="2200" b="1">
+              <a:t>07 // LIVE TWO-WAY DIALOGUE</a:t>
+            </a:r>
+          </a:p>
+          <a:p>
+            <a:pPr>
+              <a:defRPr sz="2100" b="1">
                 <a:solidFill>
                   <a:srgbClr val="FFFFFF"/>
                 </a:solidFill>
@@ -8591,12 +8695,12 @@
               </a:defRPr>
             </a:pPr>
             <a:r>
-              <a:t>DETERMINISTIC CONTEXT-AWARE GRAMMAR ENGINE</a:t>
-            </a:r>
-          </a:p>
-          <a:p>
-            <a:pPr>
-              <a:defRPr sz="1100">
+              <a:t>TWO-WAY LIVE CONVERSATION STREAM</a:t>
+            </a:r>
+          </a:p>
+          <a:p>
+            <a:pPr>
+              <a:defRPr sz="1050">
                 <a:solidFill>
                   <a:srgbClr val="9CA3AF"/>
                 </a:solidFill>
@@ -8604,7 +8708,7 @@
               </a:defRPr>
             </a:pPr>
             <a:r>
-              <a:t>Why Signify uses a grounded grammar engine rather than an ungrounded Cloud LLM.</a:t>
+              <a:t>A unified conversation stream bridging both participants with instant audio playback.</a:t>
             </a:r>
           </a:p>
         </p:txBody>
@@ -8617,8 +8721,8 @@
         </p:nvSpPr>
         <p:spPr>
           <a:xfrm>
-            <a:off x="731520" y="6446520"/>
-            <a:ext cx="10698480" cy="320040"/>
+            <a:off x="731520" y="6492240"/>
+            <a:ext cx="10698480" cy="274320"/>
           </a:xfrm>
           <a:prstGeom prst="rect">
             <a:avLst/>
@@ -8632,7 +8736,7 @@
           <a:lstStyle/>
           <a:p>
             <a:pPr>
-              <a:defRPr sz="850" b="1">
+              <a:defRPr sz="800" b="1">
                 <a:solidFill>
                   <a:srgbClr val="5A5F6E"/>
                 </a:solidFill>
@@ -8654,13 +8758,203 @@
         <p:spPr>
           <a:xfrm>
             <a:off x="731520" y="1645920"/>
-            <a:ext cx="5120640" cy="4389120"/>
+            <a:ext cx="6858000" cy="4389120"/>
           </a:xfrm>
           <a:prstGeom prst="roundRect">
             <a:avLst/>
           </a:prstGeom>
           <a:solidFill>
-            <a:srgbClr val="13151C"/>
+            <a:srgbClr val="12141A"/>
+          </a:solidFill>
+          <a:ln w="15240">
+            <a:solidFill>
+              <a:srgbClr val="2A2E3A"/>
+            </a:solidFill>
+          </a:ln>
+        </p:spPr>
+        <p:style>
+          <a:lnRef idx="1">
+            <a:schemeClr val="accent1"/>
+          </a:lnRef>
+          <a:fillRef idx="3">
+            <a:schemeClr val="accent1"/>
+          </a:fillRef>
+          <a:effectRef idx="2">
+            <a:schemeClr val="accent1"/>
+          </a:effectRef>
+          <a:fontRef idx="minor">
+            <a:schemeClr val="lt1"/>
+          </a:fontRef>
+        </p:style>
+        <p:txBody>
+          <a:bodyPr rtlCol="0" anchor="ctr" wrap="square" lIns="320040" rIns="320040" tIns="320040"/>
+          <a:lstStyle/>
+          <a:p>
+            <a:pPr algn="ctr">
+              <a:defRPr sz="1200" b="1">
+                <a:solidFill>
+                  <a:srgbClr val="FFD000"/>
+                </a:solidFill>
+                <a:latin typeface="Consolas"/>
+              </a:defRPr>
+            </a:pPr>
+            <a:r>
+              <a:t>FULL TWO-WAY COMMUNICATION BRIDGE</a:t>
+            </a:r>
+          </a:p>
+          <a:p>
+            <a:br/>
+            <a:pPr>
+              <a:defRPr sz="1050" b="1">
+                <a:solidFill>
+                  <a:srgbClr val="FFFFFF"/>
+                </a:solidFill>
+                <a:latin typeface="Consolas"/>
+              </a:defRPr>
+            </a:pPr>
+            <a:r>
+              <a:t>▶ DISTINCT SPEAKER ROLES</a:t>
+            </a:r>
+          </a:p>
+          <a:p>
+            <a:pPr>
+              <a:defRPr sz="1000">
+                <a:solidFill>
+                  <a:srgbClr val="9CA3AF"/>
+                </a:solidFill>
+                <a:latin typeface="Segoe UI"/>
+              </a:defRPr>
+            </a:pPr>
+            <a:r>
+              <a:t>Gold badge for SIGN (YOU) vs. Gray card for SPEECH (OTHER PERSON).</a:t>
+            </a:r>
+          </a:p>
+          <a:p>
+            <a:br/>
+            <a:pPr>
+              <a:defRPr sz="1050" b="1">
+                <a:solidFill>
+                  <a:srgbClr val="FFFFFF"/>
+                </a:solidFill>
+                <a:latin typeface="Consolas"/>
+              </a:defRPr>
+            </a:pPr>
+            <a:r>
+              <a:t>▶ SIGN TOKEN TRACEABILITY</a:t>
+            </a:r>
+          </a:p>
+          <a:p>
+            <a:pPr>
+              <a:defRPr sz="1000">
+                <a:solidFill>
+                  <a:srgbClr val="9CA3AF"/>
+                </a:solidFill>
+                <a:latin typeface="Segoe UI"/>
+              </a:defRPr>
+            </a:pPr>
+            <a:r>
+              <a:t>Shows underlying Kaggle tokens (e.g. [HELLO HOW YOU], [BYE]).</a:t>
+            </a:r>
+          </a:p>
+          <a:p>
+            <a:br/>
+            <a:pPr>
+              <a:defRPr sz="1050" b="1">
+                <a:solidFill>
+                  <a:srgbClr val="FFFFFF"/>
+                </a:solidFill>
+                <a:latin typeface="Consolas"/>
+              </a:defRPr>
+            </a:pPr>
+            <a:r>
+              <a:t>▶ ONE-TOUCH AUDIO PLAYBACK</a:t>
+            </a:r>
+          </a:p>
+          <a:p>
+            <a:pPr>
+              <a:defRPr sz="1000">
+                <a:solidFill>
+                  <a:srgbClr val="9CA3AF"/>
+                </a:solidFill>
+                <a:latin typeface="Segoe UI"/>
+              </a:defRPr>
+            </a:pPr>
+            <a:r>
+              <a:t>Play/Stop speech synthesis button on every chat bubble.</a:t>
+            </a:r>
+          </a:p>
+          <a:p>
+            <a:br/>
+            <a:pPr>
+              <a:defRPr sz="1050" b="1">
+                <a:solidFill>
+                  <a:srgbClr val="FFFFFF"/>
+                </a:solidFill>
+                <a:latin typeface="Consolas"/>
+              </a:defRPr>
+            </a:pPr>
+            <a:r>
+              <a:t>▶ QUICK ACTIONS</a:t>
+            </a:r>
+          </a:p>
+          <a:p>
+            <a:pPr>
+              <a:defRPr sz="1000">
+                <a:solidFill>
+                  <a:srgbClr val="9CA3AF"/>
+                </a:solidFill>
+                <a:latin typeface="Segoe UI"/>
+              </a:defRPr>
+            </a:pPr>
+            <a:r>
+              <a:t>[ 🤟 SIGN ] camera modal &amp; [ 🎤 SPEAK ] voice modal always available.</a:t>
+            </a:r>
+          </a:p>
+          <a:p>
+            <a:br/>
+            <a:pPr>
+              <a:defRPr sz="1050" b="1">
+                <a:solidFill>
+                  <a:srgbClr val="FFFFFF"/>
+                </a:solidFill>
+                <a:latin typeface="Consolas"/>
+              </a:defRPr>
+            </a:pPr>
+            <a:r>
+              <a:t>▶ CONVERSATION MEMORY</a:t>
+            </a:r>
+          </a:p>
+          <a:p>
+            <a:pPr>
+              <a:defRPr sz="1000">
+                <a:solidFill>
+                  <a:srgbClr val="9CA3AF"/>
+                </a:solidFill>
+                <a:latin typeface="Segoe UI"/>
+              </a:defRPr>
+            </a:pPr>
+            <a:r>
+              <a:t>Maintains full transcript for medical triage or emergency review.</a:t>
+            </a:r>
+          </a:p>
+        </p:txBody>
+      </p:sp>
+      <p:sp>
+        <p:nvSpPr>
+          <p:cNvPr id="7" name="Rounded Rectangle 6"/>
+          <p:cNvSpPr/>
+          <p:nvPr/>
+        </p:nvSpPr>
+        <p:spPr>
+          <a:xfrm>
+            <a:off x="8339328" y="1572768"/>
+            <a:ext cx="2432304" cy="4535424"/>
+          </a:xfrm>
+          <a:prstGeom prst="roundRect">
+            <a:avLst/>
+          </a:prstGeom>
+          <a:solidFill>
+            <a:srgbClr val="0E0F14"/>
           </a:solidFill>
           <a:ln w="15240">
             <a:solidFill>
@@ -8683,160 +8977,37 @@
           </a:fontRef>
         </p:style>
         <p:txBody>
-          <a:bodyPr rtlCol="0" anchor="ctr" wrap="square" lIns="320040" rIns="320040" tIns="320040"/>
-          <a:lstStyle/>
-          <a:p>
-            <a:pPr algn="ctr">
-              <a:defRPr sz="1200" b="1">
-                <a:solidFill>
-                  <a:srgbClr val="FFD000"/>
-                </a:solidFill>
-                <a:latin typeface="Consolas"/>
-              </a:defRPr>
-            </a:pPr>
-            <a:r>
-              <a:t>GROUNDED RULE &amp; CONTEXT GRAMMAR</a:t>
-            </a:r>
-          </a:p>
-          <a:p>
-            <a:pPr>
-              <a:defRPr sz="1500" b="1">
-                <a:solidFill>
-                  <a:srgbClr val="FFFFFF"/>
-                </a:solidFill>
-                <a:latin typeface="Segoe UI"/>
-              </a:defRPr>
-            </a:pPr>
-            <a:r>
-              <a:t>How Raw Signs Become Meaningful Sentences</a:t>
-            </a:r>
-          </a:p>
-          <a:p>
-            <a:br/>
-            <a:pPr>
-              <a:defRPr sz="1100">
-                <a:solidFill>
-                  <a:srgbClr val="FFFFFF"/>
-                </a:solidFill>
-                <a:latin typeface="Segoe UI"/>
-              </a:defRPr>
-            </a:pPr>
-            <a:r>
-              <a:t>• [ WATER ] + [ PLEASE ] → "Please may I have some water?"</a:t>
-            </a:r>
-            <a:br/>
-            <a:r>
-              <a:t>• [ SICK ] + [ OWIE ] → "I am sick and experiencing severe pain."</a:t>
-            </a:r>
-            <a:br/>
-            <a:r>
-              <a:t>• [ POLICE ] + [ CALL ON PHONE ] → "Please call the police immediately."</a:t>
-            </a:r>
-            <a:br/>
-            <a:r>
-              <a:t>• [ WHERE ] + [ BATH ] → "Excuse me, where is the nearest restroom?"</a:t>
-            </a:r>
-            <a:br/>
-            <a:r>
-              <a:t>• Smart Assembler: Categorizes states, actions, and objects to weave complete English sentences with articles &amp; conjunctions.</a:t>
-            </a:r>
-          </a:p>
-        </p:txBody>
-      </p:sp>
-      <p:sp>
-        <p:nvSpPr>
-          <p:cNvPr id="7" name="Rounded Rectangle 6"/>
-          <p:cNvSpPr/>
+          <a:bodyPr rtlCol="0" anchor="ctr"/>
+          <a:lstStyle/>
+          <a:p>
+            <a:pPr algn="ctr"/>
+          </a:p>
+        </p:txBody>
+      </p:sp>
+      <p:pic>
+        <p:nvPicPr>
+          <p:cNvPr id="8" name="Picture 7" descr="media_1790023358607.png"/>
+          <p:cNvPicPr>
+            <a:picLocks noChangeAspect="1"/>
+          </p:cNvPicPr>
           <p:nvPr/>
-        </p:nvSpPr>
-        <p:spPr>
-          <a:xfrm>
-            <a:off x="6309360" y="1645920"/>
-            <a:ext cx="5120640" cy="4389120"/>
-          </a:xfrm>
-          <a:prstGeom prst="roundRect">
-            <a:avLst/>
-          </a:prstGeom>
-          <a:solidFill>
-            <a:srgbClr val="13151C"/>
-          </a:solidFill>
-          <a:ln w="15240">
-            <a:solidFill>
-              <a:srgbClr val="282C38"/>
-            </a:solidFill>
-          </a:ln>
-        </p:spPr>
-        <p:style>
-          <a:lnRef idx="1">
-            <a:schemeClr val="accent1"/>
-          </a:lnRef>
-          <a:fillRef idx="3">
-            <a:schemeClr val="accent1"/>
-          </a:fillRef>
-          <a:effectRef idx="2">
-            <a:schemeClr val="accent1"/>
-          </a:effectRef>
-          <a:fontRef idx="minor">
-            <a:schemeClr val="lt1"/>
-          </a:fontRef>
-        </p:style>
-        <p:txBody>
-          <a:bodyPr rtlCol="0" anchor="ctr" wrap="square" lIns="320040" rIns="320040" tIns="320040"/>
-          <a:lstStyle/>
-          <a:p>
-            <a:pPr algn="ctr">
-              <a:defRPr sz="1200" b="1">
-                <a:solidFill>
-                  <a:srgbClr val="06B6D4"/>
-                </a:solidFill>
-                <a:latin typeface="Consolas"/>
-              </a:defRPr>
-            </a:pPr>
-            <a:r>
-              <a:t>COMPARISON: SIGNIFY vs. CLOUD LLM</a:t>
-            </a:r>
-          </a:p>
-          <a:p>
-            <a:pPr>
-              <a:defRPr sz="1500" b="1">
-                <a:solidFill>
-                  <a:srgbClr val="FFFFFF"/>
-                </a:solidFill>
-                <a:latin typeface="Segoe UI"/>
-              </a:defRPr>
-            </a:pPr>
-            <a:r>
-              <a:t>Why Generic LLMs Fail in Real Emergencies</a:t>
-            </a:r>
-          </a:p>
-          <a:p>
-            <a:br/>
-            <a:pPr>
-              <a:defRPr sz="1100">
-                <a:solidFill>
-                  <a:srgbClr val="9CA3AF"/>
-                </a:solidFill>
-                <a:latin typeface="Segoe UI"/>
-              </a:defRPr>
-            </a:pPr>
-            <a:r>
-              <a:t>• Latency: Cloud LLMs add 1,200ms+ network delay. Signify runs in &lt; 2ms.</a:t>
-            </a:r>
-            <a:br/>
-            <a:r>
-              <a:t>• Hallucinations: LLMs invent medical facts or signs not signed. Signify is 100% deterministic.</a:t>
-            </a:r>
-            <a:br/>
-            <a:r>
-              <a:t>• Offline Resilience: LLMs fail when internet drops. Signify operates completely offline on-device.</a:t>
-            </a:r>
-            <a:br/>
-            <a:r>
-              <a:t>• Data Privacy: Zero conversation data leaves the smartphone (HIPAA compliant).</a:t>
-            </a:r>
-          </a:p>
-        </p:txBody>
-      </p:sp>
+        </p:nvPicPr>
+        <p:blipFill>
+          <a:blip r:embed="rId2"/>
+          <a:stretch>
+            <a:fillRect/>
+          </a:stretch>
+        </p:blipFill>
+        <p:spPr>
+          <a:xfrm>
+            <a:off x="8412480" y="1645920"/>
+            <a:ext cx="2286000" cy="4389120"/>
+          </a:xfrm>
+          <a:prstGeom prst="rect">
+            <a:avLst/>
+          </a:prstGeom>
+        </p:spPr>
+      </p:pic>
     </p:spTree>
   </p:cSld>
   <p:clrMapOvr>
@@ -8964,7 +9135,7 @@
           <a:lstStyle/>
           <a:p>
             <a:pPr>
-              <a:defRPr sz="1000" b="1">
+              <a:defRPr sz="950" b="1">
                 <a:solidFill>
                   <a:srgbClr val="FFD000"/>
                 </a:solidFill>
@@ -8972,12 +9143,12 @@
               </a:defRPr>
             </a:pPr>
             <a:r>
-              <a:t>08 // SYSTEM PIPELINE</a:t>
-            </a:r>
-          </a:p>
-          <a:p>
-            <a:pPr>
-              <a:defRPr sz="2200" b="1">
+              <a:t>08 // REVERSE VOICE INGEST</a:t>
+            </a:r>
+          </a:p>
+          <a:p>
+            <a:pPr>
+              <a:defRPr sz="2100" b="1">
                 <a:solidFill>
                   <a:srgbClr val="FFFFFF"/>
                 </a:solidFill>
@@ -8985,12 +9156,12 @@
               </a:defRPr>
             </a:pPr>
             <a:r>
-              <a:t>END-TO-END MODULAR PROCESSING ARCHITECTURE</a:t>
-            </a:r>
-          </a:p>
-          <a:p>
-            <a:pPr>
-              <a:defRPr sz="1100">
+              <a:t>VOICE-TO-TEXT: LISTENING TO THE HEARING PARTNER</a:t>
+            </a:r>
+          </a:p>
+          <a:p>
+            <a:pPr>
+              <a:defRPr sz="1050">
                 <a:solidFill>
                   <a:srgbClr val="9CA3AF"/>
                 </a:solidFill>
@@ -8998,7 +9169,7 @@
               </a:defRPr>
             </a:pPr>
             <a:r>
-              <a:t>A strictly decoupled, high-performance pipeline engineered for sub-frame execution.</a:t>
+              <a:t>Capturing speech in high-noise environments with real-time waveform feedback.</a:t>
             </a:r>
           </a:p>
         </p:txBody>
@@ -9011,8 +9182,8 @@
         </p:nvSpPr>
         <p:spPr>
           <a:xfrm>
-            <a:off x="731520" y="6446520"/>
-            <a:ext cx="10698480" cy="320040"/>
+            <a:off x="731520" y="6492240"/>
+            <a:ext cx="10698480" cy="274320"/>
           </a:xfrm>
           <a:prstGeom prst="rect">
             <a:avLst/>
@@ -9026,7 +9197,7 @@
           <a:lstStyle/>
           <a:p>
             <a:pPr>
-              <a:defRPr sz="850" b="1">
+              <a:defRPr sz="800" b="1">
                 <a:solidFill>
                   <a:srgbClr val="5A5F6E"/>
                 </a:solidFill>
@@ -9048,17 +9219,17 @@
         <p:spPr>
           <a:xfrm>
             <a:off x="731520" y="1645920"/>
-            <a:ext cx="2057400" cy="4389120"/>
+            <a:ext cx="6858000" cy="4389120"/>
           </a:xfrm>
           <a:prstGeom prst="roundRect">
             <a:avLst/>
           </a:prstGeom>
           <a:solidFill>
-            <a:srgbClr val="13151C"/>
+            <a:srgbClr val="12141A"/>
           </a:solidFill>
           <a:ln w="15240">
             <a:solidFill>
-              <a:srgbClr val="282C38"/>
+              <a:srgbClr val="2A2E3A"/>
             </a:solidFill>
           </a:ln>
         </p:spPr>
@@ -9077,49 +9248,36 @@
           </a:fontRef>
         </p:style>
         <p:txBody>
-          <a:bodyPr rtlCol="0" anchor="ctr" wrap="square" lIns="164592" rIns="164592" tIns="274320"/>
+          <a:bodyPr rtlCol="0" anchor="ctr" wrap="square" lIns="320040" rIns="320040" tIns="320040"/>
           <a:lstStyle/>
           <a:p>
             <a:pPr algn="ctr">
-              <a:defRPr sz="2200" b="1">
-                <a:solidFill>
-                  <a:srgbClr val="FFD000"/>
+              <a:defRPr sz="1200" b="1">
+                <a:solidFill>
+                  <a:srgbClr val="06B6D4"/>
                 </a:solidFill>
                 <a:latin typeface="Consolas"/>
               </a:defRPr>
             </a:pPr>
             <a:r>
-              <a:t>01</a:t>
-            </a:r>
-          </a:p>
-          <a:p>
-            <a:pPr>
-              <a:defRPr sz="1300" b="1">
+              <a:t>VOICE CAPTURE &amp; TRANSCRIPTION FEATURES</a:t>
+            </a:r>
+          </a:p>
+          <a:p>
+            <a:br/>
+            <a:pPr>
+              <a:defRPr sz="1050" b="1">
                 <a:solidFill>
                   <a:srgbClr val="FFFFFF"/>
                 </a:solidFill>
-                <a:latin typeface="Segoe UI"/>
-              </a:defRPr>
-            </a:pPr>
-            <a:r>
-              <a:t>VISION INGEST</a:t>
-            </a:r>
-          </a:p>
-          <a:p>
-            <a:pPr>
-              <a:defRPr sz="900" b="1">
-                <a:solidFill>
-                  <a:srgbClr val="06B6D4"/>
-                </a:solidFill>
                 <a:latin typeface="Consolas"/>
               </a:defRPr>
             </a:pPr>
             <a:r>
-              <a:t>60 FPS Video Stream</a:t>
-            </a:r>
-          </a:p>
-          <a:p>
-            <a:br/>
+              <a:t>▶ ONE-TAP VOICE CAPTURE</a:t>
+            </a:r>
+          </a:p>
+          <a:p>
             <a:pPr>
               <a:defRPr sz="1000">
                 <a:solidFill>
@@ -9129,7 +9287,88 @@
               </a:defRPr>
             </a:pPr>
             <a:r>
-              <a:t>Captures camera frames in rolling memory buffer.</a:t>
+              <a:t>Large high-contrast microphone button designed for effortless hand-off.</a:t>
+            </a:r>
+          </a:p>
+          <a:p>
+            <a:br/>
+            <a:pPr>
+              <a:defRPr sz="1050" b="1">
+                <a:solidFill>
+                  <a:srgbClr val="FFFFFF"/>
+                </a:solidFill>
+                <a:latin typeface="Consolas"/>
+              </a:defRPr>
+            </a:pPr>
+            <a:r>
+              <a:t>▶ REAL-TIME WAVEFORM FEEDBACK</a:t>
+            </a:r>
+          </a:p>
+          <a:p>
+            <a:pPr>
+              <a:defRPr sz="1000">
+                <a:solidFill>
+                  <a:srgbClr val="9CA3AF"/>
+                </a:solidFill>
+                <a:latin typeface="Segoe UI"/>
+              </a:defRPr>
+            </a:pPr>
+            <a:r>
+              <a:t>Visual pulsing waveform confirms active audio capture to the deaf user.</a:t>
+            </a:r>
+          </a:p>
+          <a:p>
+            <a:br/>
+            <a:pPr>
+              <a:defRPr sz="1050" b="1">
+                <a:solidFill>
+                  <a:srgbClr val="FFFFFF"/>
+                </a:solidFill>
+                <a:latin typeface="Consolas"/>
+              </a:defRPr>
+            </a:pPr>
+            <a:r>
+              <a:t>▶ DIRECTIONAL NOISE SUPPRESSION</a:t>
+            </a:r>
+          </a:p>
+          <a:p>
+            <a:pPr>
+              <a:defRPr sz="1000">
+                <a:solidFill>
+                  <a:srgbClr val="9CA3AF"/>
+                </a:solidFill>
+                <a:latin typeface="Segoe UI"/>
+              </a:defRPr>
+            </a:pPr>
+            <a:r>
+              <a:t>Leverages iQOO dual-microphone array to isolate speech from ambient hospital noise.</a:t>
+            </a:r>
+          </a:p>
+          <a:p>
+            <a:br/>
+            <a:pPr>
+              <a:defRPr sz="1050" b="1">
+                <a:solidFill>
+                  <a:srgbClr val="FFFFFF"/>
+                </a:solidFill>
+                <a:latin typeface="Consolas"/>
+              </a:defRPr>
+            </a:pPr>
+            <a:r>
+              <a:t>▶ SINGLE-DISPATCH TRANSCRIPTION</a:t>
+            </a:r>
+          </a:p>
+          <a:p>
+            <a:pPr>
+              <a:defRPr sz="1000">
+                <a:solidFill>
+                  <a:srgbClr val="9CA3AF"/>
+                </a:solidFill>
+                <a:latin typeface="Segoe UI"/>
+              </a:defRPr>
+            </a:pPr>
+            <a:r>
+              <a:t>Zero-duplicate dispatch engine prevents echo messages in the chat stream.</a:t>
             </a:r>
           </a:p>
         </p:txBody>
@@ -9142,18 +9381,18 @@
         </p:nvSpPr>
         <p:spPr>
           <a:xfrm>
-            <a:off x="2926080" y="1645920"/>
-            <a:ext cx="2057400" cy="4389120"/>
+            <a:off x="8339328" y="1572768"/>
+            <a:ext cx="2432304" cy="4535424"/>
           </a:xfrm>
           <a:prstGeom prst="roundRect">
             <a:avLst/>
           </a:prstGeom>
           <a:solidFill>
-            <a:srgbClr val="13151C"/>
+            <a:srgbClr val="0E0F14"/>
           </a:solidFill>
           <a:ln w="15240">
             <a:solidFill>
-              <a:srgbClr val="282C38"/>
+              <a:srgbClr val="06B6D4"/>
             </a:solidFill>
           </a:ln>
         </p:spPr>
@@ -9172,348 +9411,37 @@
           </a:fontRef>
         </p:style>
         <p:txBody>
-          <a:bodyPr rtlCol="0" anchor="ctr" wrap="square" lIns="164592" rIns="164592" tIns="274320"/>
-          <a:lstStyle/>
-          <a:p>
-            <a:pPr algn="ctr">
-              <a:defRPr sz="2200" b="1">
-                <a:solidFill>
-                  <a:srgbClr val="FFD000"/>
-                </a:solidFill>
-                <a:latin typeface="Consolas"/>
-              </a:defRPr>
-            </a:pPr>
-            <a:r>
-              <a:t>02</a:t>
-            </a:r>
-          </a:p>
-          <a:p>
-            <a:pPr>
-              <a:defRPr sz="1300" b="1">
-                <a:solidFill>
-                  <a:srgbClr val="FFFFFF"/>
-                </a:solidFill>
-                <a:latin typeface="Segoe UI"/>
-              </a:defRPr>
-            </a:pPr>
-            <a:r>
-              <a:t>LANDMARK EXTRACTION</a:t>
-            </a:r>
-          </a:p>
-          <a:p>
-            <a:pPr>
-              <a:defRPr sz="900" b="1">
-                <a:solidFill>
-                  <a:srgbClr val="06B6D4"/>
-                </a:solidFill>
-                <a:latin typeface="Consolas"/>
-              </a:defRPr>
-            </a:pPr>
-            <a:r>
-              <a:t>MediaPipe 543 Keypoints</a:t>
-            </a:r>
-          </a:p>
-          <a:p>
-            <a:br/>
-            <a:pPr>
-              <a:defRPr sz="1000">
-                <a:solidFill>
-                  <a:srgbClr val="9CA3AF"/>
-                </a:solidFill>
-                <a:latin typeface="Segoe UI"/>
-              </a:defRPr>
-            </a:pPr>
-            <a:r>
-              <a:t>Extracts normalized 3D hand, face, and pose landmarks.</a:t>
-            </a:r>
-          </a:p>
-        </p:txBody>
-      </p:sp>
-      <p:sp>
-        <p:nvSpPr>
-          <p:cNvPr id="8" name="Rounded Rectangle 7"/>
-          <p:cNvSpPr/>
+          <a:bodyPr rtlCol="0" anchor="ctr"/>
+          <a:lstStyle/>
+          <a:p>
+            <a:pPr algn="ctr"/>
+          </a:p>
+        </p:txBody>
+      </p:sp>
+      <p:pic>
+        <p:nvPicPr>
+          <p:cNvPr id="8" name="Picture 7" descr="media_1790023432638.png"/>
+          <p:cNvPicPr>
+            <a:picLocks noChangeAspect="1"/>
+          </p:cNvPicPr>
           <p:nvPr/>
-        </p:nvSpPr>
-        <p:spPr>
-          <a:xfrm>
-            <a:off x="5120640" y="1645920"/>
-            <a:ext cx="2057400" cy="4389120"/>
-          </a:xfrm>
-          <a:prstGeom prst="roundRect">
-            <a:avLst/>
-          </a:prstGeom>
-          <a:solidFill>
-            <a:srgbClr val="13151C"/>
-          </a:solidFill>
-          <a:ln w="15240">
-            <a:solidFill>
-              <a:srgbClr val="FFD000"/>
-            </a:solidFill>
-          </a:ln>
-        </p:spPr>
-        <p:style>
-          <a:lnRef idx="1">
-            <a:schemeClr val="accent1"/>
-          </a:lnRef>
-          <a:fillRef idx="3">
-            <a:schemeClr val="accent1"/>
-          </a:fillRef>
-          <a:effectRef idx="2">
-            <a:schemeClr val="accent1"/>
-          </a:effectRef>
-          <a:fontRef idx="minor">
-            <a:schemeClr val="lt1"/>
-          </a:fontRef>
-        </p:style>
-        <p:txBody>
-          <a:bodyPr rtlCol="0" anchor="ctr" wrap="square" lIns="164592" rIns="164592" tIns="274320"/>
-          <a:lstStyle/>
-          <a:p>
-            <a:pPr algn="ctr">
-              <a:defRPr sz="2200" b="1">
-                <a:solidFill>
-                  <a:srgbClr val="FFD000"/>
-                </a:solidFill>
-                <a:latin typeface="Consolas"/>
-              </a:defRPr>
-            </a:pPr>
-            <a:r>
-              <a:t>03</a:t>
-            </a:r>
-          </a:p>
-          <a:p>
-            <a:pPr>
-              <a:defRPr sz="1300" b="1">
-                <a:solidFill>
-                  <a:srgbClr val="FFFFFF"/>
-                </a:solidFill>
-                <a:latin typeface="Segoe UI"/>
-              </a:defRPr>
-            </a:pPr>
-            <a:r>
-              <a:t>MODEL INFERENCE</a:t>
-            </a:r>
-          </a:p>
-          <a:p>
-            <a:pPr>
-              <a:defRPr sz="900" b="1">
-                <a:solidFill>
-                  <a:srgbClr val="06B6D4"/>
-                </a:solidFill>
-                <a:latin typeface="Consolas"/>
-              </a:defRPr>
-            </a:pPr>
-            <a:r>
-              <a:t>Kaggle ASL 250 (TFLite)</a:t>
-            </a:r>
-          </a:p>
-          <a:p>
-            <a:br/>
-            <a:pPr>
-              <a:defRPr sz="1000">
-                <a:solidFill>
-                  <a:srgbClr val="9CA3AF"/>
-                </a:solidFill>
-                <a:latin typeface="Segoe UI"/>
-              </a:defRPr>
-            </a:pPr>
-            <a:r>
-              <a:t>Transformer / 1D-CNN predicts top classes via Softmax.</a:t>
-            </a:r>
-          </a:p>
-        </p:txBody>
-      </p:sp>
-      <p:sp>
-        <p:nvSpPr>
-          <p:cNvPr id="9" name="Rounded Rectangle 8"/>
-          <p:cNvSpPr/>
-          <p:nvPr/>
-        </p:nvSpPr>
-        <p:spPr>
-          <a:xfrm>
-            <a:off x="7315199" y="1645920"/>
-            <a:ext cx="2057400" cy="4389120"/>
-          </a:xfrm>
-          <a:prstGeom prst="roundRect">
-            <a:avLst/>
-          </a:prstGeom>
-          <a:solidFill>
-            <a:srgbClr val="13151C"/>
-          </a:solidFill>
-          <a:ln w="15240">
-            <a:solidFill>
-              <a:srgbClr val="FFD000"/>
-            </a:solidFill>
-          </a:ln>
-        </p:spPr>
-        <p:style>
-          <a:lnRef idx="1">
-            <a:schemeClr val="accent1"/>
-          </a:lnRef>
-          <a:fillRef idx="3">
-            <a:schemeClr val="accent1"/>
-          </a:fillRef>
-          <a:effectRef idx="2">
-            <a:schemeClr val="accent1"/>
-          </a:effectRef>
-          <a:fontRef idx="minor">
-            <a:schemeClr val="lt1"/>
-          </a:fontRef>
-        </p:style>
-        <p:txBody>
-          <a:bodyPr rtlCol="0" anchor="ctr" wrap="square" lIns="164592" rIns="164592" tIns="274320"/>
-          <a:lstStyle/>
-          <a:p>
-            <a:pPr algn="ctr">
-              <a:defRPr sz="2200" b="1">
-                <a:solidFill>
-                  <a:srgbClr val="FFD000"/>
-                </a:solidFill>
-                <a:latin typeface="Consolas"/>
-              </a:defRPr>
-            </a:pPr>
-            <a:r>
-              <a:t>04</a:t>
-            </a:r>
-          </a:p>
-          <a:p>
-            <a:pPr>
-              <a:defRPr sz="1300" b="1">
-                <a:solidFill>
-                  <a:srgbClr val="FFFFFF"/>
-                </a:solidFill>
-                <a:latin typeface="Segoe UI"/>
-              </a:defRPr>
-            </a:pPr>
-            <a:r>
-              <a:t>SAFETY GATE</a:t>
-            </a:r>
-          </a:p>
-          <a:p>
-            <a:pPr>
-              <a:defRPr sz="900" b="1">
-                <a:solidFill>
-                  <a:srgbClr val="06B6D4"/>
-                </a:solidFill>
-                <a:latin typeface="Consolas"/>
-              </a:defRPr>
-            </a:pPr>
-            <a:r>
-              <a:t>≥70% + Temporal Stability</a:t>
-            </a:r>
-          </a:p>
-          <a:p>
-            <a:br/>
-            <a:pPr>
-              <a:defRPr sz="1000">
-                <a:solidFill>
-                  <a:srgbClr val="9CA3AF"/>
-                </a:solidFill>
-                <a:latin typeface="Segoe UI"/>
-              </a:defRPr>
-            </a:pPr>
-            <a:r>
-              <a:t>Filters low-confidence artifacts and duplicate token spam.</a:t>
-            </a:r>
-          </a:p>
-        </p:txBody>
-      </p:sp>
-      <p:sp>
-        <p:nvSpPr>
-          <p:cNvPr id="10" name="Rounded Rectangle 9"/>
-          <p:cNvSpPr/>
-          <p:nvPr/>
-        </p:nvSpPr>
-        <p:spPr>
-          <a:xfrm>
-            <a:off x="9509760" y="1645920"/>
-            <a:ext cx="2057400" cy="4389120"/>
-          </a:xfrm>
-          <a:prstGeom prst="roundRect">
-            <a:avLst/>
-          </a:prstGeom>
-          <a:solidFill>
-            <a:srgbClr val="13151C"/>
-          </a:solidFill>
-          <a:ln w="15240">
-            <a:solidFill>
-              <a:srgbClr val="282C38"/>
-            </a:solidFill>
-          </a:ln>
-        </p:spPr>
-        <p:style>
-          <a:lnRef idx="1">
-            <a:schemeClr val="accent1"/>
-          </a:lnRef>
-          <a:fillRef idx="3">
-            <a:schemeClr val="accent1"/>
-          </a:fillRef>
-          <a:effectRef idx="2">
-            <a:schemeClr val="accent1"/>
-          </a:effectRef>
-          <a:fontRef idx="minor">
-            <a:schemeClr val="lt1"/>
-          </a:fontRef>
-        </p:style>
-        <p:txBody>
-          <a:bodyPr rtlCol="0" anchor="ctr" wrap="square" lIns="164592" rIns="164592" tIns="274320"/>
-          <a:lstStyle/>
-          <a:p>
-            <a:pPr algn="ctr">
-              <a:defRPr sz="2200" b="1">
-                <a:solidFill>
-                  <a:srgbClr val="FFD000"/>
-                </a:solidFill>
-                <a:latin typeface="Consolas"/>
-              </a:defRPr>
-            </a:pPr>
-            <a:r>
-              <a:t>05</a:t>
-            </a:r>
-          </a:p>
-          <a:p>
-            <a:pPr>
-              <a:defRPr sz="1300" b="1">
-                <a:solidFill>
-                  <a:srgbClr val="FFFFFF"/>
-                </a:solidFill>
-                <a:latin typeface="Segoe UI"/>
-              </a:defRPr>
-            </a:pPr>
-            <a:r>
-              <a:t>SPEECH &amp; HAPTICS</a:t>
-            </a:r>
-          </a:p>
-          <a:p>
-            <a:pPr>
-              <a:defRPr sz="900" b="1">
-                <a:solidFill>
-                  <a:srgbClr val="06B6D4"/>
-                </a:solidFill>
-                <a:latin typeface="Consolas"/>
-              </a:defRPr>
-            </a:pPr>
-            <a:r>
-              <a:t>Context Engine + Audio</a:t>
-            </a:r>
-          </a:p>
-          <a:p>
-            <a:br/>
-            <a:pPr>
-              <a:defRPr sz="1000">
-                <a:solidFill>
-                  <a:srgbClr val="9CA3AF"/>
-                </a:solidFill>
-                <a:latin typeface="Segoe UI"/>
-              </a:defRPr>
-            </a:pPr>
-            <a:r>
-              <a:t>Synthesizes natural phrase + audio speech + tactile pulses.</a:t>
-            </a:r>
-          </a:p>
-        </p:txBody>
-      </p:sp>
+        </p:nvPicPr>
+        <p:blipFill>
+          <a:blip r:embed="rId2"/>
+          <a:stretch>
+            <a:fillRect/>
+          </a:stretch>
+        </p:blipFill>
+        <p:spPr>
+          <a:xfrm>
+            <a:off x="8412480" y="1645920"/>
+            <a:ext cx="2286000" cy="4389120"/>
+          </a:xfrm>
+          <a:prstGeom prst="rect">
+            <a:avLst/>
+          </a:prstGeom>
+        </p:spPr>
+      </p:pic>
     </p:spTree>
   </p:cSld>
   <p:clrMapOvr>
